--- a/assets/figures-editable/c3-c4/c4-e02.pptx
+++ b/assets/figures-editable/c3-c4/c4-e02.pptx
@@ -3104,8 +3104,8 @@
         </p:nvSpPr>
         <p:spPr>
           <a:xfrm>
-            <a:off x="274320" y="137160"/>
-            <a:ext cx="11612880" cy="365760"/>
+            <a:off x="274320" y="118872"/>
+            <a:ext cx="11612880" cy="340105"/>
           </a:xfrm>
           <a:prstGeom prst="rect">
             <a:avLst/>
@@ -3114,7 +3114,7 @@
           <a:effectLst/>
         </p:spPr>
         <p:txBody>
-          <a:bodyPr wrap="square" lIns="27432" rIns="27432" tIns="18288" bIns="18288" anchor="ctr">
+          <a:bodyPr wrap="none" lIns="18288" rIns="18288" tIns="18288" bIns="18288" anchor="t">
             <a:spAutoFit/>
           </a:bodyPr>
           <a:lstStyle/>
@@ -3125,7 +3125,7 @@
               </a:spcAft>
             </a:pPr>
             <a:r>
-              <a:rPr sz="2100" b="0" i="0">
+              <a:rPr sz="1900" b="1" i="0">
                 <a:solidFill>
                   <a:srgbClr val="8EDBD4"/>
                 </a:solidFill>
@@ -3136,23 +3136,20 @@
           </a:p>
         </p:txBody>
       </p:sp>
-      <p:sp>
-        <p:nvSpPr>
-          <p:cNvPr id="3" name="C4-E02 rect 1" descr="sci-ppt:o001"/>
-          <p:cNvSpPr/>
+      <p:cxnSp>
+        <p:nvCxnSpPr>
+          <p:cNvPr id="3" name="C4-E02 line 1" descr="sci-ppt:o001"/>
+          <p:cNvCxnSpPr/>
           <p:nvPr/>
-        </p:nvSpPr>
+        </p:nvCxnSpPr>
         <p:spPr>
           <a:xfrm>
-            <a:off x="1005840" y="1280160"/>
-            <a:ext cx="9144000" cy="365760"/>
+            <a:off x="914400" y="4663440"/>
+            <a:ext cx="5852160" cy="0"/>
           </a:xfrm>
-          <a:prstGeom prst="rect">
+          <a:prstGeom prst="line">
             <a:avLst/>
           </a:prstGeom>
-          <a:solidFill>
-            <a:srgbClr val="213E4B"/>
-          </a:solidFill>
           <a:ln w="19050">
             <a:solidFill>
               <a:srgbClr val="B4C7D2"/>
@@ -3160,120 +3157,83 @@
           </a:ln>
           <a:effectLst/>
         </p:spPr>
-        <p:txBody>
-          <a:bodyPr rtlCol="0" anchor="ctr"/>
-          <a:lstStyle/>
-          <a:p>
-            <a:pPr algn="ctr"/>
-          </a:p>
-        </p:txBody>
-      </p:sp>
+      </p:cxnSp>
       <p:cxnSp>
         <p:nvCxnSpPr>
-          <p:cNvPr id="4" name="C4-E02 arrow 2" descr="sci-ppt:o002"/>
+          <p:cNvPr id="4" name="C4-E02 line 2" descr="sci-ppt:o002"/>
           <p:cNvCxnSpPr/>
           <p:nvPr/>
         </p:nvCxnSpPr>
         <p:spPr>
-          <a:xfrm flipV="1">
-            <a:off x="2743200" y="1737360"/>
-            <a:ext cx="0" cy="1097280"/>
+          <a:xfrm>
+            <a:off x="914400" y="1371600"/>
+            <a:ext cx="0" cy="3291840"/>
           </a:xfrm>
           <a:prstGeom prst="line">
             <a:avLst/>
           </a:prstGeom>
-          <a:ln w="25400">
+          <a:ln w="19050">
             <a:solidFill>
-              <a:srgbClr val="8EDBD4"/>
+              <a:srgbClr val="B4C7D2"/>
             </a:solidFill>
-            <a:headEnd type="none" w="med" len="med"/>
-            <a:tailEnd type="triangle" w="med" len="med"/>
           </a:ln>
           <a:effectLst/>
         </p:spPr>
       </p:cxnSp>
       <p:cxnSp>
         <p:nvCxnSpPr>
-          <p:cNvPr id="5" name="C4-E02 arrow 3" descr="sci-ppt:o003"/>
+          <p:cNvPr id="5" name="C4-E02 line 3" descr="sci-ppt:o003"/>
           <p:cNvCxnSpPr/>
           <p:nvPr/>
         </p:nvCxnSpPr>
         <p:spPr>
-          <a:xfrm flipV="1">
-            <a:off x="5486400" y="1737360"/>
-            <a:ext cx="0" cy="1097280"/>
+          <a:xfrm>
+            <a:off x="914400" y="4663440"/>
+            <a:ext cx="0" cy="64008"/>
           </a:xfrm>
           <a:prstGeom prst="line">
             <a:avLst/>
           </a:prstGeom>
-          <a:ln w="25400">
+          <a:ln w="12700">
             <a:solidFill>
-              <a:srgbClr val="8EDBD4"/>
+              <a:srgbClr val="B4C7D2"/>
             </a:solidFill>
-            <a:headEnd type="none" w="med" len="med"/>
-            <a:tailEnd type="triangle" w="med" len="med"/>
           </a:ln>
           <a:effectLst/>
         </p:spPr>
       </p:cxnSp>
       <p:cxnSp>
         <p:nvCxnSpPr>
-          <p:cNvPr id="6" name="C4-E02 arrow 4" descr="sci-ppt:o004"/>
-          <p:cNvCxnSpPr/>
-          <p:nvPr/>
-        </p:nvCxnSpPr>
-        <p:spPr>
-          <a:xfrm flipV="1">
-            <a:off x="8229600" y="1737360"/>
-            <a:ext cx="0" cy="1097280"/>
-          </a:xfrm>
-          <a:prstGeom prst="line">
-            <a:avLst/>
-          </a:prstGeom>
-          <a:ln w="25400">
-            <a:solidFill>
-              <a:srgbClr val="8EDBD4"/>
-            </a:solidFill>
-            <a:headEnd type="none" w="med" len="med"/>
-            <a:tailEnd type="triangle" w="med" len="med"/>
-          </a:ln>
-          <a:effectLst/>
-        </p:spPr>
-      </p:cxnSp>
-      <p:cxnSp>
-        <p:nvCxnSpPr>
-          <p:cNvPr id="7" name="C4-E02 arrow 5" descr="sci-ppt:o005"/>
+          <p:cNvPr id="6" name="C4-E02 line 4" descr="sci-ppt:o004"/>
           <p:cNvCxnSpPr/>
           <p:nvPr/>
         </p:nvCxnSpPr>
         <p:spPr>
           <a:xfrm>
-            <a:off x="9601200" y="1691640"/>
-            <a:ext cx="0" cy="868680"/>
+            <a:off x="914400" y="1371600"/>
+            <a:ext cx="0" cy="3291840"/>
           </a:xfrm>
           <a:prstGeom prst="line">
             <a:avLst/>
           </a:prstGeom>
-          <a:ln w="25400">
+          <a:ln w="7620">
             <a:solidFill>
-              <a:srgbClr val="8EDBD4"/>
+              <a:srgbClr val="2E4756"/>
             </a:solidFill>
-            <a:headEnd type="none" w="med" len="med"/>
-            <a:tailEnd type="triangle" w="med" len="med"/>
           </a:ln>
           <a:effectLst/>
         </p:spPr>
       </p:cxnSp>
       <p:sp>
         <p:nvSpPr>
-          <p:cNvPr id="8" name="C4-E02 text 6" descr="sci-ppt:o006"/>
+          <p:cNvPr id="7" name="C4-E02 text 5" descr="sci-ppt:o005"/>
           <p:cNvSpPr txBox="1"/>
           <p:nvPr/>
         </p:nvSpPr>
         <p:spPr>
           <a:xfrm>
-            <a:off x="9829800" y="2011680"/>
-            <a:ext cx="1828800" cy="548640"/>
+            <a:off x="457200" y="4745736"/>
+            <a:ext cx="914400" cy="208407"/>
           </a:xfrm>
           <a:prstGeom prst="rect">
             <a:avLst/>
@@ -3282,54 +3242,82 @@
           <a:effectLst/>
         </p:spPr>
         <p:txBody>
-          <a:bodyPr wrap="square" lIns="27432" rIns="27432" tIns="18288" bIns="18288" anchor="ctr">
+          <a:bodyPr wrap="none" lIns="18288" rIns="18288" tIns="18288" bIns="18288" anchor="t">
             <a:spAutoFit/>
           </a:bodyPr>
           <a:lstStyle/>
           <a:p>
-            <a:pPr algn="l">
+            <a:pPr algn="ctr">
               <a:spcAft>
                 <a:spcPts val="0"/>
               </a:spcAft>
             </a:pPr>
             <a:r>
-              <a:rPr sz="1600" b="0" i="0">
+              <a:rPr sz="1050" b="0" i="0">
                 <a:solidFill>
-                  <a:srgbClr val="E7F0F3"/>
+                  <a:srgbClr val="B4C7D2"/>
                 </a:solidFill>
                 <a:latin typeface="Arial"/>
               </a:rPr>
-              <a:t>n_f ↓</a:t>
-            </a:r>
-          </a:p>
-          <a:p>
-            <a:pPr algn="l">
-              <a:spcAft>
-                <a:spcPts val="0"/>
-              </a:spcAft>
-            </a:pPr>
-            <a:r>
-              <a:rPr sz="1600" b="0" i="0">
-                <a:solidFill>
-                  <a:srgbClr val="E7F0F3"/>
-                </a:solidFill>
-                <a:latin typeface="Arial"/>
-              </a:rPr>
-              <a:t>solid → liquid</a:t>
-            </a:r>
-          </a:p>
-        </p:txBody>
-      </p:sp>
-      <p:sp>
-        <p:nvSpPr>
-          <p:cNvPr id="9" name="C4-E02 text 7" descr="sci-ppt:o007"/>
+              <a:t>0</a:t>
+            </a:r>
+          </a:p>
+        </p:txBody>
+      </p:sp>
+      <p:cxnSp>
+        <p:nvCxnSpPr>
+          <p:cNvPr id="8" name="C4-E02 line 6" descr="sci-ppt:o006"/>
+          <p:cNvCxnSpPr/>
+          <p:nvPr/>
+        </p:nvCxnSpPr>
+        <p:spPr>
+          <a:xfrm>
+            <a:off x="2377440" y="4663440"/>
+            <a:ext cx="0" cy="64008"/>
+          </a:xfrm>
+          <a:prstGeom prst="line">
+            <a:avLst/>
+          </a:prstGeom>
+          <a:ln w="12700">
+            <a:solidFill>
+              <a:srgbClr val="B4C7D2"/>
+            </a:solidFill>
+          </a:ln>
+          <a:effectLst/>
+        </p:spPr>
+      </p:cxnSp>
+      <p:cxnSp>
+        <p:nvCxnSpPr>
+          <p:cNvPr id="9" name="C4-E02 line 7" descr="sci-ppt:o007"/>
+          <p:cNvCxnSpPr/>
+          <p:nvPr/>
+        </p:nvCxnSpPr>
+        <p:spPr>
+          <a:xfrm>
+            <a:off x="2377440" y="1371600"/>
+            <a:ext cx="0" cy="3291840"/>
+          </a:xfrm>
+          <a:prstGeom prst="line">
+            <a:avLst/>
+          </a:prstGeom>
+          <a:ln w="7620">
+            <a:solidFill>
+              <a:srgbClr val="2E4756"/>
+            </a:solidFill>
+          </a:ln>
+          <a:effectLst/>
+        </p:spPr>
+      </p:cxnSp>
+      <p:sp>
+        <p:nvSpPr>
+          <p:cNvPr id="10" name="C4-E02 text 8" descr="sci-ppt:o008"/>
           <p:cNvSpPr txBox="1"/>
           <p:nvPr/>
         </p:nvSpPr>
         <p:spPr>
           <a:xfrm>
-            <a:off x="1005840" y="731520"/>
-            <a:ext cx="9144000" cy="365760"/>
+            <a:off x="1920240" y="4745736"/>
+            <a:ext cx="914400" cy="208407"/>
           </a:xfrm>
           <a:prstGeom prst="rect">
             <a:avLst/>
@@ -3338,64 +3326,24 @@
           <a:effectLst/>
         </p:spPr>
         <p:txBody>
-          <a:bodyPr wrap="square" lIns="27432" rIns="27432" tIns="18288" bIns="18288" anchor="ctr">
+          <a:bodyPr wrap="none" lIns="18288" rIns="18288" tIns="18288" bIns="18288" anchor="t">
             <a:spAutoFit/>
           </a:bodyPr>
           <a:lstStyle/>
           <a:p>
-            <a:pPr algn="l">
+            <a:pPr algn="ctr">
               <a:spcAft>
                 <a:spcPts val="0"/>
               </a:spcAft>
             </a:pPr>
             <a:r>
-              <a:rPr sz="1800" b="0" i="0">
+              <a:rPr sz="1050" b="0" i="0">
                 <a:solidFill>
-                  <a:srgbClr val="E7F0F3"/>
+                  <a:srgbClr val="B4C7D2"/>
                 </a:solidFill>
                 <a:latin typeface="Arial"/>
               </a:rPr>
-              <a:t>Film / solid; positive departure and velocity v_f ↑</a:t>
-            </a:r>
-          </a:p>
-        </p:txBody>
-      </p:sp>
-      <p:sp>
-        <p:nvSpPr>
-          <p:cNvPr id="10" name="C4-E02 text 8" descr="sci-ppt:o008"/>
-          <p:cNvSpPr txBox="1"/>
-          <p:nvPr/>
-        </p:nvSpPr>
-        <p:spPr>
-          <a:xfrm>
-            <a:off x="1188720" y="3108960"/>
-            <a:ext cx="9144000" cy="457200"/>
-          </a:xfrm>
-          <a:prstGeom prst="rect">
-            <a:avLst/>
-          </a:prstGeom>
-          <a:noFill/>
-          <a:effectLst/>
-        </p:spPr>
-        <p:txBody>
-          <a:bodyPr wrap="square" lIns="27432" rIns="27432" tIns="18288" bIns="18288" anchor="ctr">
-            <a:spAutoFit/>
-          </a:bodyPr>
-          <a:lstStyle/>
-          <a:p>
-            <a:pPr algn="l">
-              <a:spcAft>
-                <a:spcPts val="0"/>
-              </a:spcAft>
-            </a:pPr>
-            <a:r>
-              <a:rPr sz="1800" b="0" i="0">
-                <a:solidFill>
-                  <a:srgbClr val="8EDBD4"/>
-                </a:solidFill>
-                <a:latin typeface="Arial"/>
-              </a:rPr>
-              <a:t>Liquid below: t_l = T_l n_f; pressure traction opposes n_f.</a:t>
+              <a:t>10</a:t>
             </a:r>
           </a:p>
         </p:txBody>
@@ -3408,30 +3356,52 @@
         </p:nvCxnSpPr>
         <p:spPr>
           <a:xfrm>
-            <a:off x="274320" y="3977639"/>
-            <a:ext cx="11612880" cy="0"/>
+            <a:off x="3840480" y="4663440"/>
+            <a:ext cx="0" cy="64008"/>
           </a:xfrm>
           <a:prstGeom prst="line">
             <a:avLst/>
           </a:prstGeom>
           <a:ln w="12700">
             <a:solidFill>
-              <a:srgbClr val="405967"/>
+              <a:srgbClr val="B4C7D2"/>
             </a:solidFill>
           </a:ln>
           <a:effectLst/>
         </p:spPr>
       </p:cxnSp>
-      <p:sp>
-        <p:nvSpPr>
-          <p:cNvPr id="12" name="C4-E02 text 10" descr="sci-ppt:o010"/>
+      <p:cxnSp>
+        <p:nvCxnSpPr>
+          <p:cNvPr id="12" name="C4-E02 line 10" descr="sci-ppt:o010"/>
+          <p:cNvCxnSpPr/>
+          <p:nvPr/>
+        </p:nvCxnSpPr>
+        <p:spPr>
+          <a:xfrm>
+            <a:off x="3840480" y="1371600"/>
+            <a:ext cx="0" cy="3291840"/>
+          </a:xfrm>
+          <a:prstGeom prst="line">
+            <a:avLst/>
+          </a:prstGeom>
+          <a:ln w="7620">
+            <a:solidFill>
+              <a:srgbClr val="2E4756"/>
+            </a:solidFill>
+          </a:ln>
+          <a:effectLst/>
+        </p:spPr>
+      </p:cxnSp>
+      <p:sp>
+        <p:nvSpPr>
+          <p:cNvPr id="13" name="C4-E02 text 11" descr="sci-ppt:o011"/>
           <p:cNvSpPr txBox="1"/>
           <p:nvPr/>
         </p:nvSpPr>
         <p:spPr>
           <a:xfrm>
-            <a:off x="320040" y="4096512"/>
-            <a:ext cx="5715000" cy="246888"/>
+            <a:off x="3383280" y="4745736"/>
+            <a:ext cx="914400" cy="208407"/>
           </a:xfrm>
           <a:prstGeom prst="rect">
             <a:avLst/>
@@ -3440,38 +3410,82 @@
           <a:effectLst/>
         </p:spPr>
         <p:txBody>
-          <a:bodyPr wrap="square" lIns="27432" rIns="27432" tIns="18288" bIns="18288" anchor="ctr">
+          <a:bodyPr wrap="none" lIns="18288" rIns="18288" tIns="18288" bIns="18288" anchor="t">
             <a:spAutoFit/>
           </a:bodyPr>
           <a:lstStyle/>
           <a:p>
-            <a:pPr algn="l">
+            <a:pPr algn="ctr">
               <a:spcAft>
                 <a:spcPts val="0"/>
               </a:spcAft>
             </a:pPr>
             <a:r>
-              <a:rPr sz="1150" b="0" i="0">
+              <a:rPr sz="1050" b="0" i="0">
                 <a:solidFill>
                   <a:srgbClr val="B4C7D2"/>
                 </a:solidFill>
                 <a:latin typeface="Arial"/>
               </a:rPr>
-              <a:t>• A_f(t) — loaded footprint</a:t>
-            </a:r>
-          </a:p>
-        </p:txBody>
-      </p:sp>
-      <p:sp>
-        <p:nvSpPr>
-          <p:cNvPr id="13" name="C4-E02 text 11" descr="sci-ppt:o011"/>
+              <a:t>20</a:t>
+            </a:r>
+          </a:p>
+        </p:txBody>
+      </p:sp>
+      <p:cxnSp>
+        <p:nvCxnSpPr>
+          <p:cNvPr id="14" name="C4-E02 line 12" descr="sci-ppt:o012"/>
+          <p:cNvCxnSpPr/>
+          <p:nvPr/>
+        </p:nvCxnSpPr>
+        <p:spPr>
+          <a:xfrm>
+            <a:off x="5303520" y="4663440"/>
+            <a:ext cx="0" cy="64008"/>
+          </a:xfrm>
+          <a:prstGeom prst="line">
+            <a:avLst/>
+          </a:prstGeom>
+          <a:ln w="12700">
+            <a:solidFill>
+              <a:srgbClr val="B4C7D2"/>
+            </a:solidFill>
+          </a:ln>
+          <a:effectLst/>
+        </p:spPr>
+      </p:cxnSp>
+      <p:cxnSp>
+        <p:nvCxnSpPr>
+          <p:cNvPr id="15" name="C4-E02 line 13" descr="sci-ppt:o013"/>
+          <p:cNvCxnSpPr/>
+          <p:nvPr/>
+        </p:nvCxnSpPr>
+        <p:spPr>
+          <a:xfrm>
+            <a:off x="5303520" y="1371600"/>
+            <a:ext cx="0" cy="3291840"/>
+          </a:xfrm>
+          <a:prstGeom prst="line">
+            <a:avLst/>
+          </a:prstGeom>
+          <a:ln w="7620">
+            <a:solidFill>
+              <a:srgbClr val="2E4756"/>
+            </a:solidFill>
+          </a:ln>
+          <a:effectLst/>
+        </p:spPr>
+      </p:cxnSp>
+      <p:sp>
+        <p:nvSpPr>
+          <p:cNvPr id="16" name="C4-E02 text 14" descr="sci-ppt:o014"/>
           <p:cNvSpPr txBox="1"/>
           <p:nvPr/>
         </p:nvSpPr>
         <p:spPr>
           <a:xfrm>
-            <a:off x="6217920" y="4096512"/>
-            <a:ext cx="5715000" cy="246888"/>
+            <a:off x="4846320" y="4745736"/>
+            <a:ext cx="914400" cy="208407"/>
           </a:xfrm>
           <a:prstGeom prst="rect">
             <a:avLst/>
@@ -3480,38 +3494,82 @@
           <a:effectLst/>
         </p:spPr>
         <p:txBody>
-          <a:bodyPr wrap="square" lIns="27432" rIns="27432" tIns="18288" bIns="18288" anchor="ctr">
+          <a:bodyPr wrap="none" lIns="18288" rIns="18288" tIns="18288" bIns="18288" anchor="t">
             <a:spAutoFit/>
           </a:bodyPr>
           <a:lstStyle/>
           <a:p>
-            <a:pPr algn="l">
+            <a:pPr algn="ctr">
               <a:spcAft>
                 <a:spcPts val="0"/>
               </a:spcAft>
             </a:pPr>
             <a:r>
-              <a:rPr sz="1150" b="0" i="0">
+              <a:rPr sz="1050" b="0" i="0">
                 <a:solidFill>
                   <a:srgbClr val="B4C7D2"/>
                 </a:solidFill>
                 <a:latin typeface="Arial"/>
               </a:rPr>
-              <a:t>• t_l → applied traction</a:t>
-            </a:r>
-          </a:p>
-        </p:txBody>
-      </p:sp>
-      <p:sp>
-        <p:nvSpPr>
-          <p:cNvPr id="14" name="C4-E02 text 12" descr="sci-ppt:o012"/>
+              <a:t>30</a:t>
+            </a:r>
+          </a:p>
+        </p:txBody>
+      </p:sp>
+      <p:cxnSp>
+        <p:nvCxnSpPr>
+          <p:cNvPr id="17" name="C4-E02 line 15" descr="sci-ppt:o015"/>
+          <p:cNvCxnSpPr/>
+          <p:nvPr/>
+        </p:nvCxnSpPr>
+        <p:spPr>
+          <a:xfrm>
+            <a:off x="6766560" y="4663440"/>
+            <a:ext cx="0" cy="64008"/>
+          </a:xfrm>
+          <a:prstGeom prst="line">
+            <a:avLst/>
+          </a:prstGeom>
+          <a:ln w="12700">
+            <a:solidFill>
+              <a:srgbClr val="B4C7D2"/>
+            </a:solidFill>
+          </a:ln>
+          <a:effectLst/>
+        </p:spPr>
+      </p:cxnSp>
+      <p:cxnSp>
+        <p:nvCxnSpPr>
+          <p:cNvPr id="18" name="C4-E02 line 16" descr="sci-ppt:o016"/>
+          <p:cNvCxnSpPr/>
+          <p:nvPr/>
+        </p:nvCxnSpPr>
+        <p:spPr>
+          <a:xfrm>
+            <a:off x="6766560" y="1371600"/>
+            <a:ext cx="0" cy="3291840"/>
+          </a:xfrm>
+          <a:prstGeom prst="line">
+            <a:avLst/>
+          </a:prstGeom>
+          <a:ln w="7620">
+            <a:solidFill>
+              <a:srgbClr val="2E4756"/>
+            </a:solidFill>
+          </a:ln>
+          <a:effectLst/>
+        </p:spPr>
+      </p:cxnSp>
+      <p:sp>
+        <p:nvSpPr>
+          <p:cNvPr id="19" name="C4-E02 text 17" descr="sci-ppt:o017"/>
           <p:cNvSpPr txBox="1"/>
           <p:nvPr/>
         </p:nvSpPr>
         <p:spPr>
           <a:xfrm>
-            <a:off x="320040" y="4329684"/>
-            <a:ext cx="5715000" cy="246888"/>
+            <a:off x="6309360" y="4745736"/>
+            <a:ext cx="914400" cy="208407"/>
           </a:xfrm>
           <a:prstGeom prst="rect">
             <a:avLst/>
@@ -3520,38 +3578,104 @@
           <a:effectLst/>
         </p:spPr>
         <p:txBody>
-          <a:bodyPr wrap="square" lIns="27432" rIns="27432" tIns="18288" bIns="18288" anchor="ctr">
+          <a:bodyPr wrap="none" lIns="18288" rIns="18288" tIns="18288" bIns="18288" anchor="t">
             <a:spAutoFit/>
           </a:bodyPr>
           <a:lstStyle/>
           <a:p>
-            <a:pPr algn="l">
+            <a:pPr algn="ctr">
               <a:spcAft>
                 <a:spcPts val="0"/>
               </a:spcAft>
             </a:pPr>
             <a:r>
-              <a:rPr sz="1150" b="0" i="0">
+              <a:rPr sz="1050" b="0" i="0">
                 <a:solidFill>
                   <a:srgbClr val="B4C7D2"/>
                 </a:solidFill>
                 <a:latin typeface="Arial"/>
               </a:rPr>
-              <a:t>• v_f ↑ moving film</a:t>
-            </a:r>
-          </a:p>
-        </p:txBody>
-      </p:sp>
-      <p:sp>
-        <p:nvSpPr>
-          <p:cNvPr id="15" name="C4-E02 text 13" descr="sci-ppt:o013"/>
+              <a:t>40</a:t>
+            </a:r>
+          </a:p>
+        </p:txBody>
+      </p:sp>
+      <p:cxnSp>
+        <p:nvCxnSpPr>
+          <p:cNvPr id="20" name="C4-E02 line 18" descr="sci-ppt:o018"/>
+          <p:cNvCxnSpPr/>
+          <p:nvPr/>
+        </p:nvCxnSpPr>
+        <p:spPr>
+          <a:xfrm>
+            <a:off x="850392" y="4663440"/>
+            <a:ext cx="64008" cy="0"/>
+          </a:xfrm>
+          <a:prstGeom prst="line">
+            <a:avLst/>
+          </a:prstGeom>
+          <a:ln w="12700">
+            <a:solidFill>
+              <a:srgbClr val="B4C7D2"/>
+            </a:solidFill>
+          </a:ln>
+          <a:effectLst/>
+        </p:spPr>
+      </p:cxnSp>
+      <p:cxnSp>
+        <p:nvCxnSpPr>
+          <p:cNvPr id="21" name="C4-E02 line 19" descr="sci-ppt:o019"/>
+          <p:cNvCxnSpPr/>
+          <p:nvPr/>
+        </p:nvCxnSpPr>
+        <p:spPr>
+          <a:xfrm>
+            <a:off x="850392" y="3291839"/>
+            <a:ext cx="64008" cy="0"/>
+          </a:xfrm>
+          <a:prstGeom prst="line">
+            <a:avLst/>
+          </a:prstGeom>
+          <a:ln w="12700">
+            <a:solidFill>
+              <a:srgbClr val="B4C7D2"/>
+            </a:solidFill>
+          </a:ln>
+          <a:effectLst/>
+        </p:spPr>
+      </p:cxnSp>
+      <p:cxnSp>
+        <p:nvCxnSpPr>
+          <p:cNvPr id="22" name="C4-E02 line 20" descr="sci-ppt:o020"/>
+          <p:cNvCxnSpPr/>
+          <p:nvPr/>
+        </p:nvCxnSpPr>
+        <p:spPr>
+          <a:xfrm>
+            <a:off x="914400" y="3291839"/>
+            <a:ext cx="5852160" cy="0"/>
+          </a:xfrm>
+          <a:prstGeom prst="line">
+            <a:avLst/>
+          </a:prstGeom>
+          <a:ln w="7620">
+            <a:solidFill>
+              <a:srgbClr val="2E4756"/>
+            </a:solidFill>
+          </a:ln>
+          <a:effectLst/>
+        </p:spPr>
+      </p:cxnSp>
+      <p:sp>
+        <p:nvSpPr>
+          <p:cNvPr id="23" name="C4-E02 text 21" descr="sci-ppt:o021"/>
           <p:cNvSpPr txBox="1"/>
           <p:nvPr/>
         </p:nvSpPr>
         <p:spPr>
           <a:xfrm>
-            <a:off x="6217920" y="4329684"/>
-            <a:ext cx="5715000" cy="246888"/>
+            <a:off x="45720" y="3209544"/>
+            <a:ext cx="777240" cy="208407"/>
           </a:xfrm>
           <a:prstGeom prst="rect">
             <a:avLst/>
@@ -3560,38 +3684,82 @@
           <a:effectLst/>
         </p:spPr>
         <p:txBody>
-          <a:bodyPr wrap="square" lIns="27432" rIns="27432" tIns="18288" bIns="18288" anchor="ctr">
+          <a:bodyPr wrap="none" lIns="18288" rIns="18288" tIns="18288" bIns="18288" anchor="t">
             <a:spAutoFit/>
           </a:bodyPr>
           <a:lstStyle/>
           <a:p>
-            <a:pPr algn="l">
+            <a:pPr algn="r">
               <a:spcAft>
                 <a:spcPts val="0"/>
               </a:spcAft>
             </a:pPr>
             <a:r>
-              <a:rPr sz="1150" b="0" i="0">
+              <a:rPr sz="1050" b="0" i="0">
                 <a:solidFill>
                   <a:srgbClr val="B4C7D2"/>
                 </a:solidFill>
                 <a:latin typeface="Arial"/>
               </a:rPr>
-              <a:t>• F_l — surface resultant</a:t>
-            </a:r>
-          </a:p>
-        </p:txBody>
-      </p:sp>
-      <p:sp>
-        <p:nvSpPr>
-          <p:cNvPr id="16" name="C4-E02 text 14" descr="sci-ppt:o014"/>
+              <a:t>0.5</a:t>
+            </a:r>
+          </a:p>
+        </p:txBody>
+      </p:sp>
+      <p:cxnSp>
+        <p:nvCxnSpPr>
+          <p:cNvPr id="24" name="C4-E02 line 22" descr="sci-ppt:o022"/>
+          <p:cNvCxnSpPr/>
+          <p:nvPr/>
+        </p:nvCxnSpPr>
+        <p:spPr>
+          <a:xfrm>
+            <a:off x="850392" y="1920239"/>
+            <a:ext cx="64008" cy="0"/>
+          </a:xfrm>
+          <a:prstGeom prst="line">
+            <a:avLst/>
+          </a:prstGeom>
+          <a:ln w="12700">
+            <a:solidFill>
+              <a:srgbClr val="B4C7D2"/>
+            </a:solidFill>
+          </a:ln>
+          <a:effectLst/>
+        </p:spPr>
+      </p:cxnSp>
+      <p:cxnSp>
+        <p:nvCxnSpPr>
+          <p:cNvPr id="25" name="C4-E02 line 23" descr="sci-ppt:o023"/>
+          <p:cNvCxnSpPr/>
+          <p:nvPr/>
+        </p:nvCxnSpPr>
+        <p:spPr>
+          <a:xfrm>
+            <a:off x="914400" y="1920239"/>
+            <a:ext cx="5852160" cy="0"/>
+          </a:xfrm>
+          <a:prstGeom prst="line">
+            <a:avLst/>
+          </a:prstGeom>
+          <a:ln w="7620">
+            <a:solidFill>
+              <a:srgbClr val="2E4756"/>
+            </a:solidFill>
+          </a:ln>
+          <a:effectLst/>
+        </p:spPr>
+      </p:cxnSp>
+      <p:sp>
+        <p:nvSpPr>
+          <p:cNvPr id="26" name="C4-E02 text 24" descr="sci-ppt:o024"/>
           <p:cNvSpPr txBox="1"/>
           <p:nvPr/>
         </p:nvSpPr>
         <p:spPr>
           <a:xfrm>
-            <a:off x="320040" y="4562856"/>
-            <a:ext cx="5715000" cy="246888"/>
+            <a:off x="45720" y="1837943"/>
+            <a:ext cx="777240" cy="208407"/>
           </a:xfrm>
           <a:prstGeom prst="rect">
             <a:avLst/>
@@ -3600,38 +3768,38 @@
           <a:effectLst/>
         </p:spPr>
         <p:txBody>
-          <a:bodyPr wrap="square" lIns="27432" rIns="27432" tIns="18288" bIns="18288" anchor="ctr">
+          <a:bodyPr wrap="none" lIns="18288" rIns="18288" tIns="18288" bIns="18288" anchor="t">
             <a:spAutoFit/>
           </a:bodyPr>
           <a:lstStyle/>
           <a:p>
-            <a:pPr algn="l">
+            <a:pPr algn="r">
               <a:spcAft>
                 <a:spcPts val="0"/>
               </a:spcAft>
             </a:pPr>
             <a:r>
-              <a:rPr sz="1150" b="0" i="0">
+              <a:rPr sz="1050" b="0" i="0">
                 <a:solidFill>
                   <a:srgbClr val="B4C7D2"/>
                 </a:solidFill>
                 <a:latin typeface="Arial"/>
               </a:rPr>
-              <a:t>• I_l — force-time area</a:t>
-            </a:r>
-          </a:p>
-        </p:txBody>
-      </p:sp>
-      <p:sp>
-        <p:nvSpPr>
-          <p:cNvPr id="17" name="C4-E02 text 15" descr="sci-ppt:o015"/>
+              <a:t>1.0</a:t>
+            </a:r>
+          </a:p>
+        </p:txBody>
+      </p:sp>
+      <p:sp>
+        <p:nvSpPr>
+          <p:cNvPr id="27" name="C4-E02 text 25" descr="sci-ppt:o025"/>
           <p:cNvSpPr txBox="1"/>
           <p:nvPr/>
         </p:nvSpPr>
         <p:spPr>
           <a:xfrm>
-            <a:off x="6217920" y="4562856"/>
-            <a:ext cx="5715000" cy="246888"/>
+            <a:off x="914400" y="4946903"/>
+            <a:ext cx="5852160" cy="231648"/>
           </a:xfrm>
           <a:prstGeom prst="rect">
             <a:avLst/>
@@ -3640,38 +3808,38 @@
           <a:effectLst/>
         </p:spPr>
         <p:txBody>
-          <a:bodyPr wrap="square" lIns="27432" rIns="27432" tIns="18288" bIns="18288" anchor="ctr">
+          <a:bodyPr wrap="none" lIns="18288" rIns="18288" tIns="18288" bIns="18288" anchor="t">
             <a:spAutoFit/>
           </a:bodyPr>
           <a:lstStyle/>
           <a:p>
-            <a:pPr algn="l">
+            <a:pPr algn="ctr">
               <a:spcAft>
                 <a:spcPts val="0"/>
               </a:spcAft>
             </a:pPr>
             <a:r>
-              <a:rPr sz="1150" b="0" i="0">
+              <a:rPr sz="1200" b="0" i="0">
                 <a:solidFill>
-                  <a:srgbClr val="B4C7D2"/>
+                  <a:srgbClr val="E7F0F3"/>
                 </a:solidFill>
                 <a:latin typeface="Arial"/>
               </a:rPr>
-              <a:t>• W_l — traction × displacement</a:t>
-            </a:r>
-          </a:p>
-        </p:txBody>
-      </p:sp>
-      <p:sp>
-        <p:nvSpPr>
-          <p:cNvPr id="18" name="C4-E02 text 16" descr="sci-ppt:o016"/>
+              <a:t>time  (ns)</a:t>
+            </a:r>
+          </a:p>
+        </p:txBody>
+      </p:sp>
+      <p:sp>
+        <p:nvSpPr>
+          <p:cNvPr id="28" name="C4-E02 text 26" descr="sci-ppt:o026"/>
           <p:cNvSpPr txBox="1"/>
           <p:nvPr/>
         </p:nvSpPr>
         <p:spPr>
           <a:xfrm>
-            <a:off x="320040" y="4796028"/>
-            <a:ext cx="5715000" cy="246888"/>
+            <a:off x="365760" y="1024128"/>
+            <a:ext cx="5852160" cy="231648"/>
           </a:xfrm>
           <a:prstGeom prst="rect">
             <a:avLst/>
@@ -3680,7 +3848,7 @@
           <a:effectLst/>
         </p:spPr>
         <p:txBody>
-          <a:bodyPr wrap="square" lIns="27432" rIns="27432" tIns="18288" bIns="18288" anchor="ctr">
+          <a:bodyPr wrap="none" lIns="18288" rIns="18288" tIns="18288" bIns="18288" anchor="t">
             <a:spAutoFit/>
           </a:bodyPr>
           <a:lstStyle/>
@@ -3691,27 +3859,2386 @@
               </a:spcAft>
             </a:pPr>
             <a:r>
-              <a:rPr sz="1150" b="0" i="0">
+              <a:rPr sz="1200" b="0" i="0">
                 <a:solidFill>
-                  <a:srgbClr val="B4C7D2"/>
+                  <a:srgbClr val="E7F0F3"/>
                 </a:solidFill>
                 <a:latin typeface="Arial"/>
               </a:rPr>
-              <a:t>• t_a → t_b — event interval</a:t>
-            </a:r>
-          </a:p>
-        </p:txBody>
-      </p:sp>
-      <p:sp>
-        <p:nvSpPr>
-          <p:cNvPr id="19" name="C4-E02 text 17" descr="sci-ppt:o017"/>
+              <a:t>Fₗ(t) (relative)</a:t>
+            </a:r>
+          </a:p>
+        </p:txBody>
+      </p:sp>
+      <p:sp>
+        <p:nvSpPr>
+          <p:cNvPr id="29" name="C4-E02 polygon 27" descr="sci-ppt:o027"/>
+          <p:cNvSpPr/>
+          <p:nvPr/>
+        </p:nvSpPr>
+        <p:spPr>
+          <a:xfrm>
+            <a:off x="914400" y="1920240"/>
+            <a:ext cx="5852160" cy="2743200"/>
+          </a:xfrm>
+          <a:custGeom>
+            <a:avLst/>
+            <a:gdLst/>
+            <a:ahLst/>
+            <a:cxnLst/>
+            <a:rect l="l" t="t" r="r" b="b"/>
+            <a:pathLst>
+              <a:path w="5852160" h="2743200">
+                <a:moveTo>
+                  <a:pt x="0" y="2743200"/>
+                </a:moveTo>
+                <a:lnTo>
+                  <a:pt x="19572" y="2509137"/>
+                </a:lnTo>
+                <a:lnTo>
+                  <a:pt x="39144" y="2295045"/>
+                </a:lnTo>
+                <a:lnTo>
+                  <a:pt x="58717" y="2099221"/>
+                </a:lnTo>
+                <a:lnTo>
+                  <a:pt x="78289" y="1920106"/>
+                </a:lnTo>
+                <a:lnTo>
+                  <a:pt x="97862" y="1756273"/>
+                </a:lnTo>
+                <a:lnTo>
+                  <a:pt x="117434" y="1606419"/>
+                </a:lnTo>
+                <a:lnTo>
+                  <a:pt x="137007" y="1469352"/>
+                </a:lnTo>
+                <a:lnTo>
+                  <a:pt x="156579" y="1343980"/>
+                </a:lnTo>
+                <a:lnTo>
+                  <a:pt x="176151" y="1229305"/>
+                </a:lnTo>
+                <a:lnTo>
+                  <a:pt x="195724" y="1124415"/>
+                </a:lnTo>
+                <a:lnTo>
+                  <a:pt x="215296" y="1028475"/>
+                </a:lnTo>
+                <a:lnTo>
+                  <a:pt x="234869" y="940720"/>
+                </a:lnTo>
+                <a:lnTo>
+                  <a:pt x="254441" y="860453"/>
+                </a:lnTo>
+                <a:lnTo>
+                  <a:pt x="274014" y="787035"/>
+                </a:lnTo>
+                <a:lnTo>
+                  <a:pt x="293586" y="719882"/>
+                </a:lnTo>
+                <a:lnTo>
+                  <a:pt x="313159" y="658458"/>
+                </a:lnTo>
+                <a:lnTo>
+                  <a:pt x="332731" y="602275"/>
+                </a:lnTo>
+                <a:lnTo>
+                  <a:pt x="352303" y="550886"/>
+                </a:lnTo>
+                <a:lnTo>
+                  <a:pt x="371876" y="503882"/>
+                </a:lnTo>
+                <a:lnTo>
+                  <a:pt x="391448" y="460888"/>
+                </a:lnTo>
+                <a:lnTo>
+                  <a:pt x="411021" y="421563"/>
+                </a:lnTo>
+                <a:lnTo>
+                  <a:pt x="430593" y="385593"/>
+                </a:lnTo>
+                <a:lnTo>
+                  <a:pt x="450166" y="352693"/>
+                </a:lnTo>
+                <a:lnTo>
+                  <a:pt x="469738" y="322599"/>
+                </a:lnTo>
+                <a:lnTo>
+                  <a:pt x="489311" y="295073"/>
+                </a:lnTo>
+                <a:lnTo>
+                  <a:pt x="508883" y="269896"/>
+                </a:lnTo>
+                <a:lnTo>
+                  <a:pt x="528455" y="246867"/>
+                </a:lnTo>
+                <a:lnTo>
+                  <a:pt x="548028" y="225804"/>
+                </a:lnTo>
+                <a:lnTo>
+                  <a:pt x="567600" y="206537"/>
+                </a:lnTo>
+                <a:lnTo>
+                  <a:pt x="587173" y="188914"/>
+                </a:lnTo>
+                <a:lnTo>
+                  <a:pt x="606745" y="172795"/>
+                </a:lnTo>
+                <a:lnTo>
+                  <a:pt x="626318" y="158051"/>
+                </a:lnTo>
+                <a:lnTo>
+                  <a:pt x="645890" y="144566"/>
+                </a:lnTo>
+                <a:lnTo>
+                  <a:pt x="665463" y="132231"/>
+                </a:lnTo>
+                <a:lnTo>
+                  <a:pt x="685035" y="120948"/>
+                </a:lnTo>
+                <a:lnTo>
+                  <a:pt x="704607" y="110628"/>
+                </a:lnTo>
+                <a:lnTo>
+                  <a:pt x="724180" y="101189"/>
+                </a:lnTo>
+                <a:lnTo>
+                  <a:pt x="743752" y="92555"/>
+                </a:lnTo>
+                <a:lnTo>
+                  <a:pt x="763325" y="84657"/>
+                </a:lnTo>
+                <a:lnTo>
+                  <a:pt x="782897" y="77434"/>
+                </a:lnTo>
+                <a:lnTo>
+                  <a:pt x="802470" y="70827"/>
+                </a:lnTo>
+                <a:lnTo>
+                  <a:pt x="822042" y="64784"/>
+                </a:lnTo>
+                <a:lnTo>
+                  <a:pt x="841614" y="59256"/>
+                </a:lnTo>
+                <a:lnTo>
+                  <a:pt x="861187" y="54200"/>
+                </a:lnTo>
+                <a:lnTo>
+                  <a:pt x="880759" y="49575"/>
+                </a:lnTo>
+                <a:lnTo>
+                  <a:pt x="900332" y="45345"/>
+                </a:lnTo>
+                <a:lnTo>
+                  <a:pt x="919904" y="41476"/>
+                </a:lnTo>
+                <a:lnTo>
+                  <a:pt x="939477" y="37937"/>
+                </a:lnTo>
+                <a:lnTo>
+                  <a:pt x="959049" y="34700"/>
+                </a:lnTo>
+                <a:lnTo>
+                  <a:pt x="978622" y="31739"/>
+                </a:lnTo>
+                <a:lnTo>
+                  <a:pt x="998194" y="29031"/>
+                </a:lnTo>
+                <a:lnTo>
+                  <a:pt x="1017766" y="26554"/>
+                </a:lnTo>
+                <a:lnTo>
+                  <a:pt x="1037339" y="24288"/>
+                </a:lnTo>
+                <a:lnTo>
+                  <a:pt x="1056911" y="22216"/>
+                </a:lnTo>
+                <a:lnTo>
+                  <a:pt x="1076484" y="20320"/>
+                </a:lnTo>
+                <a:lnTo>
+                  <a:pt x="1096056" y="18586"/>
+                </a:lnTo>
+                <a:lnTo>
+                  <a:pt x="1115629" y="17000"/>
+                </a:lnTo>
+                <a:lnTo>
+                  <a:pt x="1135201" y="15550"/>
+                </a:lnTo>
+                <a:lnTo>
+                  <a:pt x="1154774" y="14223"/>
+                </a:lnTo>
+                <a:lnTo>
+                  <a:pt x="1174346" y="13009"/>
+                </a:lnTo>
+                <a:lnTo>
+                  <a:pt x="1193918" y="11899"/>
+                </a:lnTo>
+                <a:lnTo>
+                  <a:pt x="1213491" y="10884"/>
+                </a:lnTo>
+                <a:lnTo>
+                  <a:pt x="1233063" y="9955"/>
+                </a:lnTo>
+                <a:lnTo>
+                  <a:pt x="1252636" y="9106"/>
+                </a:lnTo>
+                <a:lnTo>
+                  <a:pt x="1272208" y="8329"/>
+                </a:lnTo>
+                <a:lnTo>
+                  <a:pt x="1291781" y="7618"/>
+                </a:lnTo>
+                <a:lnTo>
+                  <a:pt x="1311353" y="6968"/>
+                </a:lnTo>
+                <a:lnTo>
+                  <a:pt x="1330926" y="6373"/>
+                </a:lnTo>
+                <a:lnTo>
+                  <a:pt x="1350498" y="5830"/>
+                </a:lnTo>
+                <a:lnTo>
+                  <a:pt x="1370070" y="5332"/>
+                </a:lnTo>
+                <a:lnTo>
+                  <a:pt x="1389643" y="4877"/>
+                </a:lnTo>
+                <a:lnTo>
+                  <a:pt x="1409215" y="4461"/>
+                </a:lnTo>
+                <a:lnTo>
+                  <a:pt x="1428788" y="4080"/>
+                </a:lnTo>
+                <a:lnTo>
+                  <a:pt x="1448360" y="3732"/>
+                </a:lnTo>
+                <a:lnTo>
+                  <a:pt x="1467933" y="3414"/>
+                </a:lnTo>
+                <a:lnTo>
+                  <a:pt x="1487505" y="3122"/>
+                </a:lnTo>
+                <a:lnTo>
+                  <a:pt x="1507077" y="2856"/>
+                </a:lnTo>
+                <a:lnTo>
+                  <a:pt x="1526650" y="2612"/>
+                </a:lnTo>
+                <a:lnTo>
+                  <a:pt x="1546222" y="2389"/>
+                </a:lnTo>
+                <a:lnTo>
+                  <a:pt x="1565795" y="2185"/>
+                </a:lnTo>
+                <a:lnTo>
+                  <a:pt x="1585367" y="1999"/>
+                </a:lnTo>
+                <a:lnTo>
+                  <a:pt x="1604940" y="1828"/>
+                </a:lnTo>
+                <a:lnTo>
+                  <a:pt x="1624512" y="1672"/>
+                </a:lnTo>
+                <a:lnTo>
+                  <a:pt x="1644085" y="1529"/>
+                </a:lnTo>
+                <a:lnTo>
+                  <a:pt x="1663657" y="1399"/>
+                </a:lnTo>
+                <a:lnTo>
+                  <a:pt x="1683229" y="1280"/>
+                </a:lnTo>
+                <a:lnTo>
+                  <a:pt x="1702802" y="1170"/>
+                </a:lnTo>
+                <a:lnTo>
+                  <a:pt x="1722374" y="1070"/>
+                </a:lnTo>
+                <a:lnTo>
+                  <a:pt x="1741947" y="979"/>
+                </a:lnTo>
+                <a:lnTo>
+                  <a:pt x="1761519" y="895"/>
+                </a:lnTo>
+                <a:lnTo>
+                  <a:pt x="1781092" y="819"/>
+                </a:lnTo>
+                <a:lnTo>
+                  <a:pt x="1800664" y="749"/>
+                </a:lnTo>
+                <a:lnTo>
+                  <a:pt x="1820237" y="685"/>
+                </a:lnTo>
+                <a:lnTo>
+                  <a:pt x="1839809" y="627"/>
+                </a:lnTo>
+                <a:lnTo>
+                  <a:pt x="1859381" y="573"/>
+                </a:lnTo>
+                <a:lnTo>
+                  <a:pt x="1878954" y="524"/>
+                </a:lnTo>
+                <a:lnTo>
+                  <a:pt x="1898526" y="479"/>
+                </a:lnTo>
+                <a:lnTo>
+                  <a:pt x="1918099" y="438"/>
+                </a:lnTo>
+                <a:lnTo>
+                  <a:pt x="1937671" y="401"/>
+                </a:lnTo>
+                <a:lnTo>
+                  <a:pt x="1957244" y="367"/>
+                </a:lnTo>
+                <a:lnTo>
+                  <a:pt x="1976816" y="335"/>
+                </a:lnTo>
+                <a:lnTo>
+                  <a:pt x="1996389" y="307"/>
+                </a:lnTo>
+                <a:lnTo>
+                  <a:pt x="2015961" y="281"/>
+                </a:lnTo>
+                <a:lnTo>
+                  <a:pt x="2035533" y="257"/>
+                </a:lnTo>
+                <a:lnTo>
+                  <a:pt x="2055106" y="235"/>
+                </a:lnTo>
+                <a:lnTo>
+                  <a:pt x="2074678" y="215"/>
+                </a:lnTo>
+                <a:lnTo>
+                  <a:pt x="2094251" y="196"/>
+                </a:lnTo>
+                <a:lnTo>
+                  <a:pt x="2113823" y="179"/>
+                </a:lnTo>
+                <a:lnTo>
+                  <a:pt x="2133396" y="164"/>
+                </a:lnTo>
+                <a:lnTo>
+                  <a:pt x="2152968" y="150"/>
+                </a:lnTo>
+                <a:lnTo>
+                  <a:pt x="2172541" y="137"/>
+                </a:lnTo>
+                <a:lnTo>
+                  <a:pt x="2192113" y="125"/>
+                </a:lnTo>
+                <a:lnTo>
+                  <a:pt x="2211685" y="115"/>
+                </a:lnTo>
+                <a:lnTo>
+                  <a:pt x="2231258" y="105"/>
+                </a:lnTo>
+                <a:lnTo>
+                  <a:pt x="2250830" y="96"/>
+                </a:lnTo>
+                <a:lnTo>
+                  <a:pt x="2270403" y="88"/>
+                </a:lnTo>
+                <a:lnTo>
+                  <a:pt x="2289975" y="80"/>
+                </a:lnTo>
+                <a:lnTo>
+                  <a:pt x="2309548" y="73"/>
+                </a:lnTo>
+                <a:lnTo>
+                  <a:pt x="2329120" y="67"/>
+                </a:lnTo>
+                <a:lnTo>
+                  <a:pt x="2348692" y="61"/>
+                </a:lnTo>
+                <a:lnTo>
+                  <a:pt x="2368265" y="56"/>
+                </a:lnTo>
+                <a:lnTo>
+                  <a:pt x="2387837" y="51"/>
+                </a:lnTo>
+                <a:lnTo>
+                  <a:pt x="2407410" y="47"/>
+                </a:lnTo>
+                <a:lnTo>
+                  <a:pt x="2426982" y="43"/>
+                </a:lnTo>
+                <a:lnTo>
+                  <a:pt x="2446555" y="39"/>
+                </a:lnTo>
+                <a:lnTo>
+                  <a:pt x="2466127" y="36"/>
+                </a:lnTo>
+                <a:lnTo>
+                  <a:pt x="2485700" y="33"/>
+                </a:lnTo>
+                <a:lnTo>
+                  <a:pt x="2505272" y="30"/>
+                </a:lnTo>
+                <a:lnTo>
+                  <a:pt x="2524844" y="27"/>
+                </a:lnTo>
+                <a:lnTo>
+                  <a:pt x="2544417" y="25"/>
+                </a:lnTo>
+                <a:lnTo>
+                  <a:pt x="2563989" y="23"/>
+                </a:lnTo>
+                <a:lnTo>
+                  <a:pt x="2583562" y="21"/>
+                </a:lnTo>
+                <a:lnTo>
+                  <a:pt x="2603134" y="19"/>
+                </a:lnTo>
+                <a:lnTo>
+                  <a:pt x="2622707" y="17"/>
+                </a:lnTo>
+                <a:lnTo>
+                  <a:pt x="2642279" y="16"/>
+                </a:lnTo>
+                <a:lnTo>
+                  <a:pt x="2661852" y="14"/>
+                </a:lnTo>
+                <a:lnTo>
+                  <a:pt x="2681424" y="13"/>
+                </a:lnTo>
+                <a:lnTo>
+                  <a:pt x="2700996" y="12"/>
+                </a:lnTo>
+                <a:lnTo>
+                  <a:pt x="2720569" y="11"/>
+                </a:lnTo>
+                <a:lnTo>
+                  <a:pt x="2740141" y="10"/>
+                </a:lnTo>
+                <a:lnTo>
+                  <a:pt x="2759714" y="9"/>
+                </a:lnTo>
+                <a:lnTo>
+                  <a:pt x="2779286" y="8"/>
+                </a:lnTo>
+                <a:lnTo>
+                  <a:pt x="2798859" y="7"/>
+                </a:lnTo>
+                <a:lnTo>
+                  <a:pt x="2818431" y="7"/>
+                </a:lnTo>
+                <a:lnTo>
+                  <a:pt x="2838004" y="6"/>
+                </a:lnTo>
+                <a:lnTo>
+                  <a:pt x="2857576" y="6"/>
+                </a:lnTo>
+                <a:lnTo>
+                  <a:pt x="2877148" y="5"/>
+                </a:lnTo>
+                <a:lnTo>
+                  <a:pt x="2896721" y="5"/>
+                </a:lnTo>
+                <a:lnTo>
+                  <a:pt x="2916293" y="4"/>
+                </a:lnTo>
+                <a:lnTo>
+                  <a:pt x="2935866" y="4"/>
+                </a:lnTo>
+                <a:lnTo>
+                  <a:pt x="2955438" y="3"/>
+                </a:lnTo>
+                <a:lnTo>
+                  <a:pt x="2975011" y="3"/>
+                </a:lnTo>
+                <a:lnTo>
+                  <a:pt x="2994583" y="3"/>
+                </a:lnTo>
+                <a:lnTo>
+                  <a:pt x="3014155" y="2"/>
+                </a:lnTo>
+                <a:lnTo>
+                  <a:pt x="3033728" y="2"/>
+                </a:lnTo>
+                <a:lnTo>
+                  <a:pt x="3053300" y="2"/>
+                </a:lnTo>
+                <a:lnTo>
+                  <a:pt x="3072873" y="2"/>
+                </a:lnTo>
+                <a:lnTo>
+                  <a:pt x="3092445" y="2"/>
+                </a:lnTo>
+                <a:lnTo>
+                  <a:pt x="3112018" y="1"/>
+                </a:lnTo>
+                <a:lnTo>
+                  <a:pt x="3131590" y="1"/>
+                </a:lnTo>
+                <a:lnTo>
+                  <a:pt x="3151163" y="1"/>
+                </a:lnTo>
+                <a:lnTo>
+                  <a:pt x="3170735" y="1"/>
+                </a:lnTo>
+                <a:lnTo>
+                  <a:pt x="3190307" y="1"/>
+                </a:lnTo>
+                <a:lnTo>
+                  <a:pt x="3209880" y="1"/>
+                </a:lnTo>
+                <a:lnTo>
+                  <a:pt x="3229452" y="1"/>
+                </a:lnTo>
+                <a:lnTo>
+                  <a:pt x="3249025" y="1"/>
+                </a:lnTo>
+                <a:lnTo>
+                  <a:pt x="3268597" y="0"/>
+                </a:lnTo>
+                <a:lnTo>
+                  <a:pt x="3288170" y="0"/>
+                </a:lnTo>
+                <a:lnTo>
+                  <a:pt x="3307742" y="0"/>
+                </a:lnTo>
+                <a:lnTo>
+                  <a:pt x="3327315" y="0"/>
+                </a:lnTo>
+                <a:lnTo>
+                  <a:pt x="3346887" y="0"/>
+                </a:lnTo>
+                <a:lnTo>
+                  <a:pt x="3366459" y="0"/>
+                </a:lnTo>
+                <a:lnTo>
+                  <a:pt x="3386032" y="0"/>
+                </a:lnTo>
+                <a:lnTo>
+                  <a:pt x="3405604" y="0"/>
+                </a:lnTo>
+                <a:lnTo>
+                  <a:pt x="3425177" y="0"/>
+                </a:lnTo>
+                <a:lnTo>
+                  <a:pt x="3444749" y="0"/>
+                </a:lnTo>
+                <a:lnTo>
+                  <a:pt x="3464322" y="0"/>
+                </a:lnTo>
+                <a:lnTo>
+                  <a:pt x="3483894" y="0"/>
+                </a:lnTo>
+                <a:lnTo>
+                  <a:pt x="3503467" y="0"/>
+                </a:lnTo>
+                <a:lnTo>
+                  <a:pt x="3523039" y="0"/>
+                </a:lnTo>
+                <a:lnTo>
+                  <a:pt x="3542611" y="0"/>
+                </a:lnTo>
+                <a:lnTo>
+                  <a:pt x="3562184" y="0"/>
+                </a:lnTo>
+                <a:lnTo>
+                  <a:pt x="3581756" y="0"/>
+                </a:lnTo>
+                <a:lnTo>
+                  <a:pt x="3601329" y="0"/>
+                </a:lnTo>
+                <a:lnTo>
+                  <a:pt x="3620901" y="0"/>
+                </a:lnTo>
+                <a:lnTo>
+                  <a:pt x="3640474" y="0"/>
+                </a:lnTo>
+                <a:lnTo>
+                  <a:pt x="3660046" y="0"/>
+                </a:lnTo>
+                <a:lnTo>
+                  <a:pt x="3679618" y="0"/>
+                </a:lnTo>
+                <a:lnTo>
+                  <a:pt x="3699191" y="0"/>
+                </a:lnTo>
+                <a:lnTo>
+                  <a:pt x="3718763" y="0"/>
+                </a:lnTo>
+                <a:lnTo>
+                  <a:pt x="3738336" y="0"/>
+                </a:lnTo>
+                <a:lnTo>
+                  <a:pt x="3757908" y="0"/>
+                </a:lnTo>
+                <a:lnTo>
+                  <a:pt x="3777481" y="0"/>
+                </a:lnTo>
+                <a:lnTo>
+                  <a:pt x="3797053" y="0"/>
+                </a:lnTo>
+                <a:lnTo>
+                  <a:pt x="3816626" y="0"/>
+                </a:lnTo>
+                <a:lnTo>
+                  <a:pt x="3836198" y="0"/>
+                </a:lnTo>
+                <a:lnTo>
+                  <a:pt x="3855770" y="0"/>
+                </a:lnTo>
+                <a:lnTo>
+                  <a:pt x="3875343" y="0"/>
+                </a:lnTo>
+                <a:lnTo>
+                  <a:pt x="3894915" y="0"/>
+                </a:lnTo>
+                <a:lnTo>
+                  <a:pt x="3914488" y="0"/>
+                </a:lnTo>
+                <a:lnTo>
+                  <a:pt x="3934060" y="0"/>
+                </a:lnTo>
+                <a:lnTo>
+                  <a:pt x="3953633" y="0"/>
+                </a:lnTo>
+                <a:lnTo>
+                  <a:pt x="3973205" y="0"/>
+                </a:lnTo>
+                <a:lnTo>
+                  <a:pt x="3992778" y="0"/>
+                </a:lnTo>
+                <a:lnTo>
+                  <a:pt x="4012350" y="0"/>
+                </a:lnTo>
+                <a:lnTo>
+                  <a:pt x="4031922" y="0"/>
+                </a:lnTo>
+                <a:lnTo>
+                  <a:pt x="4051495" y="0"/>
+                </a:lnTo>
+                <a:lnTo>
+                  <a:pt x="4071067" y="0"/>
+                </a:lnTo>
+                <a:lnTo>
+                  <a:pt x="4090640" y="0"/>
+                </a:lnTo>
+                <a:lnTo>
+                  <a:pt x="4110212" y="0"/>
+                </a:lnTo>
+                <a:lnTo>
+                  <a:pt x="4129785" y="0"/>
+                </a:lnTo>
+                <a:lnTo>
+                  <a:pt x="4149357" y="0"/>
+                </a:lnTo>
+                <a:lnTo>
+                  <a:pt x="4168930" y="0"/>
+                </a:lnTo>
+                <a:lnTo>
+                  <a:pt x="4188502" y="0"/>
+                </a:lnTo>
+                <a:lnTo>
+                  <a:pt x="4208074" y="0"/>
+                </a:lnTo>
+                <a:lnTo>
+                  <a:pt x="4227647" y="0"/>
+                </a:lnTo>
+                <a:lnTo>
+                  <a:pt x="4247219" y="0"/>
+                </a:lnTo>
+                <a:lnTo>
+                  <a:pt x="4266792" y="0"/>
+                </a:lnTo>
+                <a:lnTo>
+                  <a:pt x="4286364" y="0"/>
+                </a:lnTo>
+                <a:lnTo>
+                  <a:pt x="4305937" y="0"/>
+                </a:lnTo>
+                <a:lnTo>
+                  <a:pt x="4325509" y="0"/>
+                </a:lnTo>
+                <a:lnTo>
+                  <a:pt x="4345082" y="0"/>
+                </a:lnTo>
+                <a:lnTo>
+                  <a:pt x="4364654" y="0"/>
+                </a:lnTo>
+                <a:lnTo>
+                  <a:pt x="4384226" y="0"/>
+                </a:lnTo>
+                <a:lnTo>
+                  <a:pt x="4403799" y="0"/>
+                </a:lnTo>
+                <a:lnTo>
+                  <a:pt x="4423371" y="0"/>
+                </a:lnTo>
+                <a:lnTo>
+                  <a:pt x="4442944" y="0"/>
+                </a:lnTo>
+                <a:lnTo>
+                  <a:pt x="4462516" y="0"/>
+                </a:lnTo>
+                <a:lnTo>
+                  <a:pt x="4482089" y="0"/>
+                </a:lnTo>
+                <a:lnTo>
+                  <a:pt x="4501661" y="0"/>
+                </a:lnTo>
+                <a:lnTo>
+                  <a:pt x="4521233" y="0"/>
+                </a:lnTo>
+                <a:lnTo>
+                  <a:pt x="4540806" y="0"/>
+                </a:lnTo>
+                <a:lnTo>
+                  <a:pt x="4560378" y="0"/>
+                </a:lnTo>
+                <a:lnTo>
+                  <a:pt x="4579951" y="0"/>
+                </a:lnTo>
+                <a:lnTo>
+                  <a:pt x="4599523" y="0"/>
+                </a:lnTo>
+                <a:lnTo>
+                  <a:pt x="4619096" y="0"/>
+                </a:lnTo>
+                <a:lnTo>
+                  <a:pt x="4638668" y="0"/>
+                </a:lnTo>
+                <a:lnTo>
+                  <a:pt x="4658241" y="0"/>
+                </a:lnTo>
+                <a:lnTo>
+                  <a:pt x="4677813" y="0"/>
+                </a:lnTo>
+                <a:lnTo>
+                  <a:pt x="4697385" y="0"/>
+                </a:lnTo>
+                <a:lnTo>
+                  <a:pt x="4716958" y="0"/>
+                </a:lnTo>
+                <a:lnTo>
+                  <a:pt x="4736530" y="0"/>
+                </a:lnTo>
+                <a:lnTo>
+                  <a:pt x="4756103" y="0"/>
+                </a:lnTo>
+                <a:lnTo>
+                  <a:pt x="4775675" y="0"/>
+                </a:lnTo>
+                <a:lnTo>
+                  <a:pt x="4795248" y="0"/>
+                </a:lnTo>
+                <a:lnTo>
+                  <a:pt x="4814820" y="0"/>
+                </a:lnTo>
+                <a:lnTo>
+                  <a:pt x="4834393" y="0"/>
+                </a:lnTo>
+                <a:lnTo>
+                  <a:pt x="4853965" y="0"/>
+                </a:lnTo>
+                <a:lnTo>
+                  <a:pt x="4873537" y="0"/>
+                </a:lnTo>
+                <a:lnTo>
+                  <a:pt x="4893110" y="0"/>
+                </a:lnTo>
+                <a:lnTo>
+                  <a:pt x="4912682" y="0"/>
+                </a:lnTo>
+                <a:lnTo>
+                  <a:pt x="4932255" y="0"/>
+                </a:lnTo>
+                <a:lnTo>
+                  <a:pt x="4951827" y="0"/>
+                </a:lnTo>
+                <a:lnTo>
+                  <a:pt x="4971400" y="0"/>
+                </a:lnTo>
+                <a:lnTo>
+                  <a:pt x="4990972" y="2743200"/>
+                </a:lnTo>
+                <a:lnTo>
+                  <a:pt x="5010545" y="2743200"/>
+                </a:lnTo>
+                <a:lnTo>
+                  <a:pt x="5030117" y="2743200"/>
+                </a:lnTo>
+                <a:lnTo>
+                  <a:pt x="5049689" y="2743200"/>
+                </a:lnTo>
+                <a:lnTo>
+                  <a:pt x="5069262" y="2743200"/>
+                </a:lnTo>
+                <a:lnTo>
+                  <a:pt x="5088834" y="2743200"/>
+                </a:lnTo>
+                <a:lnTo>
+                  <a:pt x="5108407" y="2743200"/>
+                </a:lnTo>
+                <a:lnTo>
+                  <a:pt x="5127979" y="2743200"/>
+                </a:lnTo>
+                <a:lnTo>
+                  <a:pt x="5147552" y="2743200"/>
+                </a:lnTo>
+                <a:lnTo>
+                  <a:pt x="5167124" y="2743200"/>
+                </a:lnTo>
+                <a:lnTo>
+                  <a:pt x="5186696" y="2743200"/>
+                </a:lnTo>
+                <a:lnTo>
+                  <a:pt x="5206269" y="2743200"/>
+                </a:lnTo>
+                <a:lnTo>
+                  <a:pt x="5225841" y="2743200"/>
+                </a:lnTo>
+                <a:lnTo>
+                  <a:pt x="5245414" y="2743200"/>
+                </a:lnTo>
+                <a:lnTo>
+                  <a:pt x="5264986" y="2743200"/>
+                </a:lnTo>
+                <a:lnTo>
+                  <a:pt x="5284559" y="2743200"/>
+                </a:lnTo>
+                <a:lnTo>
+                  <a:pt x="5304131" y="2743200"/>
+                </a:lnTo>
+                <a:lnTo>
+                  <a:pt x="5323704" y="2743200"/>
+                </a:lnTo>
+                <a:lnTo>
+                  <a:pt x="5343276" y="2743200"/>
+                </a:lnTo>
+                <a:lnTo>
+                  <a:pt x="5362848" y="2743200"/>
+                </a:lnTo>
+                <a:lnTo>
+                  <a:pt x="5382421" y="2743200"/>
+                </a:lnTo>
+                <a:lnTo>
+                  <a:pt x="5401993" y="2743200"/>
+                </a:lnTo>
+                <a:lnTo>
+                  <a:pt x="5421566" y="2743200"/>
+                </a:lnTo>
+                <a:lnTo>
+                  <a:pt x="5441138" y="2743200"/>
+                </a:lnTo>
+                <a:lnTo>
+                  <a:pt x="5460711" y="2743200"/>
+                </a:lnTo>
+                <a:lnTo>
+                  <a:pt x="5480283" y="2743200"/>
+                </a:lnTo>
+                <a:lnTo>
+                  <a:pt x="5499856" y="2743200"/>
+                </a:lnTo>
+                <a:lnTo>
+                  <a:pt x="5519428" y="2743200"/>
+                </a:lnTo>
+                <a:lnTo>
+                  <a:pt x="5539000" y="2743200"/>
+                </a:lnTo>
+                <a:lnTo>
+                  <a:pt x="5558573" y="2743200"/>
+                </a:lnTo>
+                <a:lnTo>
+                  <a:pt x="5578145" y="2743200"/>
+                </a:lnTo>
+                <a:lnTo>
+                  <a:pt x="5597718" y="2743200"/>
+                </a:lnTo>
+                <a:lnTo>
+                  <a:pt x="5617290" y="2743200"/>
+                </a:lnTo>
+                <a:lnTo>
+                  <a:pt x="5636863" y="2743200"/>
+                </a:lnTo>
+                <a:lnTo>
+                  <a:pt x="5656435" y="2743200"/>
+                </a:lnTo>
+                <a:lnTo>
+                  <a:pt x="5676008" y="2743200"/>
+                </a:lnTo>
+                <a:lnTo>
+                  <a:pt x="5695580" y="2743200"/>
+                </a:lnTo>
+                <a:lnTo>
+                  <a:pt x="5715152" y="2743200"/>
+                </a:lnTo>
+                <a:lnTo>
+                  <a:pt x="5734725" y="2743200"/>
+                </a:lnTo>
+                <a:lnTo>
+                  <a:pt x="5754297" y="2743200"/>
+                </a:lnTo>
+                <a:lnTo>
+                  <a:pt x="5773870" y="2743200"/>
+                </a:lnTo>
+                <a:lnTo>
+                  <a:pt x="5793442" y="2743200"/>
+                </a:lnTo>
+                <a:lnTo>
+                  <a:pt x="5813015" y="2743200"/>
+                </a:lnTo>
+                <a:lnTo>
+                  <a:pt x="5832587" y="2743200"/>
+                </a:lnTo>
+                <a:lnTo>
+                  <a:pt x="5852160" y="2743200"/>
+                </a:lnTo>
+                <a:lnTo>
+                  <a:pt x="5852160" y="2743200"/>
+                </a:lnTo>
+                <a:lnTo>
+                  <a:pt x="5832587" y="2743200"/>
+                </a:lnTo>
+                <a:lnTo>
+                  <a:pt x="5813015" y="2743200"/>
+                </a:lnTo>
+                <a:lnTo>
+                  <a:pt x="5793442" y="2743200"/>
+                </a:lnTo>
+                <a:lnTo>
+                  <a:pt x="5773870" y="2743200"/>
+                </a:lnTo>
+                <a:lnTo>
+                  <a:pt x="5754297" y="2743200"/>
+                </a:lnTo>
+                <a:lnTo>
+                  <a:pt x="5734725" y="2743200"/>
+                </a:lnTo>
+                <a:lnTo>
+                  <a:pt x="5715152" y="2743200"/>
+                </a:lnTo>
+                <a:lnTo>
+                  <a:pt x="5695580" y="2743200"/>
+                </a:lnTo>
+                <a:lnTo>
+                  <a:pt x="5676008" y="2743200"/>
+                </a:lnTo>
+                <a:lnTo>
+                  <a:pt x="5656435" y="2743200"/>
+                </a:lnTo>
+                <a:lnTo>
+                  <a:pt x="5636863" y="2743200"/>
+                </a:lnTo>
+                <a:lnTo>
+                  <a:pt x="5617290" y="2743200"/>
+                </a:lnTo>
+                <a:lnTo>
+                  <a:pt x="5597718" y="2743200"/>
+                </a:lnTo>
+                <a:lnTo>
+                  <a:pt x="5578145" y="2743200"/>
+                </a:lnTo>
+                <a:lnTo>
+                  <a:pt x="5558573" y="2743200"/>
+                </a:lnTo>
+                <a:lnTo>
+                  <a:pt x="5539000" y="2743200"/>
+                </a:lnTo>
+                <a:lnTo>
+                  <a:pt x="5519428" y="2743200"/>
+                </a:lnTo>
+                <a:lnTo>
+                  <a:pt x="5499856" y="2743200"/>
+                </a:lnTo>
+                <a:lnTo>
+                  <a:pt x="5480283" y="2743200"/>
+                </a:lnTo>
+                <a:lnTo>
+                  <a:pt x="5460711" y="2743200"/>
+                </a:lnTo>
+                <a:lnTo>
+                  <a:pt x="5441138" y="2743200"/>
+                </a:lnTo>
+                <a:lnTo>
+                  <a:pt x="5421566" y="2743200"/>
+                </a:lnTo>
+                <a:lnTo>
+                  <a:pt x="5401993" y="2743200"/>
+                </a:lnTo>
+                <a:lnTo>
+                  <a:pt x="5382421" y="2743200"/>
+                </a:lnTo>
+                <a:lnTo>
+                  <a:pt x="5362848" y="2743200"/>
+                </a:lnTo>
+                <a:lnTo>
+                  <a:pt x="5343276" y="2743200"/>
+                </a:lnTo>
+                <a:lnTo>
+                  <a:pt x="5323704" y="2743200"/>
+                </a:lnTo>
+                <a:lnTo>
+                  <a:pt x="5304131" y="2743200"/>
+                </a:lnTo>
+                <a:lnTo>
+                  <a:pt x="5284559" y="2743200"/>
+                </a:lnTo>
+                <a:lnTo>
+                  <a:pt x="5264986" y="2743200"/>
+                </a:lnTo>
+                <a:lnTo>
+                  <a:pt x="5245414" y="2743200"/>
+                </a:lnTo>
+                <a:lnTo>
+                  <a:pt x="5225841" y="2743200"/>
+                </a:lnTo>
+                <a:lnTo>
+                  <a:pt x="5206269" y="2743200"/>
+                </a:lnTo>
+                <a:lnTo>
+                  <a:pt x="5186696" y="2743200"/>
+                </a:lnTo>
+                <a:lnTo>
+                  <a:pt x="5167124" y="2743200"/>
+                </a:lnTo>
+                <a:lnTo>
+                  <a:pt x="5147552" y="2743200"/>
+                </a:lnTo>
+                <a:lnTo>
+                  <a:pt x="5127979" y="2743200"/>
+                </a:lnTo>
+                <a:lnTo>
+                  <a:pt x="5108407" y="2743200"/>
+                </a:lnTo>
+                <a:lnTo>
+                  <a:pt x="5088834" y="2743200"/>
+                </a:lnTo>
+                <a:lnTo>
+                  <a:pt x="5069262" y="2743200"/>
+                </a:lnTo>
+                <a:lnTo>
+                  <a:pt x="5049689" y="2743200"/>
+                </a:lnTo>
+                <a:lnTo>
+                  <a:pt x="5030117" y="2743200"/>
+                </a:lnTo>
+                <a:lnTo>
+                  <a:pt x="5010545" y="2743200"/>
+                </a:lnTo>
+                <a:lnTo>
+                  <a:pt x="4990972" y="2743200"/>
+                </a:lnTo>
+                <a:lnTo>
+                  <a:pt x="4971400" y="2743200"/>
+                </a:lnTo>
+                <a:lnTo>
+                  <a:pt x="4951827" y="2743200"/>
+                </a:lnTo>
+                <a:lnTo>
+                  <a:pt x="4932255" y="2743200"/>
+                </a:lnTo>
+                <a:lnTo>
+                  <a:pt x="4912682" y="2743200"/>
+                </a:lnTo>
+                <a:lnTo>
+                  <a:pt x="4893110" y="2743200"/>
+                </a:lnTo>
+                <a:lnTo>
+                  <a:pt x="4873537" y="2743200"/>
+                </a:lnTo>
+                <a:lnTo>
+                  <a:pt x="4853965" y="2743200"/>
+                </a:lnTo>
+                <a:lnTo>
+                  <a:pt x="4834393" y="2743200"/>
+                </a:lnTo>
+                <a:lnTo>
+                  <a:pt x="4814820" y="2743200"/>
+                </a:lnTo>
+                <a:lnTo>
+                  <a:pt x="4795248" y="2743200"/>
+                </a:lnTo>
+                <a:lnTo>
+                  <a:pt x="4775675" y="2743200"/>
+                </a:lnTo>
+                <a:lnTo>
+                  <a:pt x="4756103" y="2743200"/>
+                </a:lnTo>
+                <a:lnTo>
+                  <a:pt x="4736530" y="2743200"/>
+                </a:lnTo>
+                <a:lnTo>
+                  <a:pt x="4716958" y="2743200"/>
+                </a:lnTo>
+                <a:lnTo>
+                  <a:pt x="4697385" y="2743200"/>
+                </a:lnTo>
+                <a:lnTo>
+                  <a:pt x="4677813" y="2743200"/>
+                </a:lnTo>
+                <a:lnTo>
+                  <a:pt x="4658241" y="2743200"/>
+                </a:lnTo>
+                <a:lnTo>
+                  <a:pt x="4638668" y="2743200"/>
+                </a:lnTo>
+                <a:lnTo>
+                  <a:pt x="4619096" y="2743200"/>
+                </a:lnTo>
+                <a:lnTo>
+                  <a:pt x="4599523" y="2743200"/>
+                </a:lnTo>
+                <a:lnTo>
+                  <a:pt x="4579951" y="2743200"/>
+                </a:lnTo>
+                <a:lnTo>
+                  <a:pt x="4560378" y="2743200"/>
+                </a:lnTo>
+                <a:lnTo>
+                  <a:pt x="4540806" y="2743200"/>
+                </a:lnTo>
+                <a:lnTo>
+                  <a:pt x="4521233" y="2743200"/>
+                </a:lnTo>
+                <a:lnTo>
+                  <a:pt x="4501661" y="2743200"/>
+                </a:lnTo>
+                <a:lnTo>
+                  <a:pt x="4482089" y="2743200"/>
+                </a:lnTo>
+                <a:lnTo>
+                  <a:pt x="4462516" y="2743200"/>
+                </a:lnTo>
+                <a:lnTo>
+                  <a:pt x="4442944" y="2743200"/>
+                </a:lnTo>
+                <a:lnTo>
+                  <a:pt x="4423371" y="2743200"/>
+                </a:lnTo>
+                <a:lnTo>
+                  <a:pt x="4403799" y="2743200"/>
+                </a:lnTo>
+                <a:lnTo>
+                  <a:pt x="4384226" y="2743200"/>
+                </a:lnTo>
+                <a:lnTo>
+                  <a:pt x="4364654" y="2743200"/>
+                </a:lnTo>
+                <a:lnTo>
+                  <a:pt x="4345082" y="2743200"/>
+                </a:lnTo>
+                <a:lnTo>
+                  <a:pt x="4325509" y="2743200"/>
+                </a:lnTo>
+                <a:lnTo>
+                  <a:pt x="4305937" y="2743200"/>
+                </a:lnTo>
+                <a:lnTo>
+                  <a:pt x="4286364" y="2743200"/>
+                </a:lnTo>
+                <a:lnTo>
+                  <a:pt x="4266792" y="2743200"/>
+                </a:lnTo>
+                <a:lnTo>
+                  <a:pt x="4247219" y="2743200"/>
+                </a:lnTo>
+                <a:lnTo>
+                  <a:pt x="4227647" y="2743200"/>
+                </a:lnTo>
+                <a:lnTo>
+                  <a:pt x="4208074" y="2743200"/>
+                </a:lnTo>
+                <a:lnTo>
+                  <a:pt x="4188502" y="2743200"/>
+                </a:lnTo>
+                <a:lnTo>
+                  <a:pt x="4168930" y="2743200"/>
+                </a:lnTo>
+                <a:lnTo>
+                  <a:pt x="4149357" y="2743200"/>
+                </a:lnTo>
+                <a:lnTo>
+                  <a:pt x="4129785" y="2743200"/>
+                </a:lnTo>
+                <a:lnTo>
+                  <a:pt x="4110212" y="2743200"/>
+                </a:lnTo>
+                <a:lnTo>
+                  <a:pt x="4090640" y="2743200"/>
+                </a:lnTo>
+                <a:lnTo>
+                  <a:pt x="4071067" y="2743200"/>
+                </a:lnTo>
+                <a:lnTo>
+                  <a:pt x="4051495" y="2743200"/>
+                </a:lnTo>
+                <a:lnTo>
+                  <a:pt x="4031922" y="2743200"/>
+                </a:lnTo>
+                <a:lnTo>
+                  <a:pt x="4012350" y="2743200"/>
+                </a:lnTo>
+                <a:lnTo>
+                  <a:pt x="3992778" y="2743200"/>
+                </a:lnTo>
+                <a:lnTo>
+                  <a:pt x="3973205" y="2743200"/>
+                </a:lnTo>
+                <a:lnTo>
+                  <a:pt x="3953633" y="2743200"/>
+                </a:lnTo>
+                <a:lnTo>
+                  <a:pt x="3934060" y="2743200"/>
+                </a:lnTo>
+                <a:lnTo>
+                  <a:pt x="3914488" y="2743200"/>
+                </a:lnTo>
+                <a:lnTo>
+                  <a:pt x="3894915" y="2743200"/>
+                </a:lnTo>
+                <a:lnTo>
+                  <a:pt x="3875343" y="2743200"/>
+                </a:lnTo>
+                <a:lnTo>
+                  <a:pt x="3855770" y="2743200"/>
+                </a:lnTo>
+                <a:lnTo>
+                  <a:pt x="3836198" y="2743200"/>
+                </a:lnTo>
+                <a:lnTo>
+                  <a:pt x="3816626" y="2743200"/>
+                </a:lnTo>
+                <a:lnTo>
+                  <a:pt x="3797053" y="2743200"/>
+                </a:lnTo>
+                <a:lnTo>
+                  <a:pt x="3777481" y="2743200"/>
+                </a:lnTo>
+                <a:lnTo>
+                  <a:pt x="3757908" y="2743200"/>
+                </a:lnTo>
+                <a:lnTo>
+                  <a:pt x="3738336" y="2743200"/>
+                </a:lnTo>
+                <a:lnTo>
+                  <a:pt x="3718763" y="2743200"/>
+                </a:lnTo>
+                <a:lnTo>
+                  <a:pt x="3699191" y="2743200"/>
+                </a:lnTo>
+                <a:lnTo>
+                  <a:pt x="3679618" y="2743200"/>
+                </a:lnTo>
+                <a:lnTo>
+                  <a:pt x="3660046" y="2743200"/>
+                </a:lnTo>
+                <a:lnTo>
+                  <a:pt x="3640474" y="2743200"/>
+                </a:lnTo>
+                <a:lnTo>
+                  <a:pt x="3620901" y="2743200"/>
+                </a:lnTo>
+                <a:lnTo>
+                  <a:pt x="3601329" y="2743200"/>
+                </a:lnTo>
+                <a:lnTo>
+                  <a:pt x="3581756" y="2743200"/>
+                </a:lnTo>
+                <a:lnTo>
+                  <a:pt x="3562184" y="2743200"/>
+                </a:lnTo>
+                <a:lnTo>
+                  <a:pt x="3542611" y="2743200"/>
+                </a:lnTo>
+                <a:lnTo>
+                  <a:pt x="3523039" y="2743200"/>
+                </a:lnTo>
+                <a:lnTo>
+                  <a:pt x="3503467" y="2743200"/>
+                </a:lnTo>
+                <a:lnTo>
+                  <a:pt x="3483894" y="2743200"/>
+                </a:lnTo>
+                <a:lnTo>
+                  <a:pt x="3464322" y="2743200"/>
+                </a:lnTo>
+                <a:lnTo>
+                  <a:pt x="3444749" y="2743200"/>
+                </a:lnTo>
+                <a:lnTo>
+                  <a:pt x="3425177" y="2743200"/>
+                </a:lnTo>
+                <a:lnTo>
+                  <a:pt x="3405604" y="2743200"/>
+                </a:lnTo>
+                <a:lnTo>
+                  <a:pt x="3386032" y="2743200"/>
+                </a:lnTo>
+                <a:lnTo>
+                  <a:pt x="3366459" y="2743200"/>
+                </a:lnTo>
+                <a:lnTo>
+                  <a:pt x="3346887" y="2743200"/>
+                </a:lnTo>
+                <a:lnTo>
+                  <a:pt x="3327315" y="2743200"/>
+                </a:lnTo>
+                <a:lnTo>
+                  <a:pt x="3307742" y="2743200"/>
+                </a:lnTo>
+                <a:lnTo>
+                  <a:pt x="3288170" y="2743200"/>
+                </a:lnTo>
+                <a:lnTo>
+                  <a:pt x="3268597" y="2743200"/>
+                </a:lnTo>
+                <a:lnTo>
+                  <a:pt x="3249025" y="2743200"/>
+                </a:lnTo>
+                <a:lnTo>
+                  <a:pt x="3229452" y="2743200"/>
+                </a:lnTo>
+                <a:lnTo>
+                  <a:pt x="3209880" y="2743200"/>
+                </a:lnTo>
+                <a:lnTo>
+                  <a:pt x="3190307" y="2743200"/>
+                </a:lnTo>
+                <a:lnTo>
+                  <a:pt x="3170735" y="2743200"/>
+                </a:lnTo>
+                <a:lnTo>
+                  <a:pt x="3151163" y="2743200"/>
+                </a:lnTo>
+                <a:lnTo>
+                  <a:pt x="3131590" y="2743200"/>
+                </a:lnTo>
+                <a:lnTo>
+                  <a:pt x="3112018" y="2743200"/>
+                </a:lnTo>
+                <a:lnTo>
+                  <a:pt x="3092445" y="2743200"/>
+                </a:lnTo>
+                <a:lnTo>
+                  <a:pt x="3072873" y="2743200"/>
+                </a:lnTo>
+                <a:lnTo>
+                  <a:pt x="3053300" y="2743200"/>
+                </a:lnTo>
+                <a:lnTo>
+                  <a:pt x="3033728" y="2743200"/>
+                </a:lnTo>
+                <a:lnTo>
+                  <a:pt x="3014155" y="2743200"/>
+                </a:lnTo>
+                <a:lnTo>
+                  <a:pt x="2994583" y="2743200"/>
+                </a:lnTo>
+                <a:lnTo>
+                  <a:pt x="2975011" y="2743200"/>
+                </a:lnTo>
+                <a:lnTo>
+                  <a:pt x="2955438" y="2743200"/>
+                </a:lnTo>
+                <a:lnTo>
+                  <a:pt x="2935866" y="2743200"/>
+                </a:lnTo>
+                <a:lnTo>
+                  <a:pt x="2916293" y="2743200"/>
+                </a:lnTo>
+                <a:lnTo>
+                  <a:pt x="2896721" y="2743200"/>
+                </a:lnTo>
+                <a:lnTo>
+                  <a:pt x="2877148" y="2743200"/>
+                </a:lnTo>
+                <a:lnTo>
+                  <a:pt x="2857576" y="2743200"/>
+                </a:lnTo>
+                <a:lnTo>
+                  <a:pt x="2838004" y="2743200"/>
+                </a:lnTo>
+                <a:lnTo>
+                  <a:pt x="2818431" y="2743200"/>
+                </a:lnTo>
+                <a:lnTo>
+                  <a:pt x="2798859" y="2743200"/>
+                </a:lnTo>
+                <a:lnTo>
+                  <a:pt x="2779286" y="2743200"/>
+                </a:lnTo>
+                <a:lnTo>
+                  <a:pt x="2759714" y="2743200"/>
+                </a:lnTo>
+                <a:lnTo>
+                  <a:pt x="2740141" y="2743200"/>
+                </a:lnTo>
+                <a:lnTo>
+                  <a:pt x="2720569" y="2743200"/>
+                </a:lnTo>
+                <a:lnTo>
+                  <a:pt x="2700996" y="2743200"/>
+                </a:lnTo>
+                <a:lnTo>
+                  <a:pt x="2681424" y="2743200"/>
+                </a:lnTo>
+                <a:lnTo>
+                  <a:pt x="2661852" y="2743200"/>
+                </a:lnTo>
+                <a:lnTo>
+                  <a:pt x="2642279" y="2743200"/>
+                </a:lnTo>
+                <a:lnTo>
+                  <a:pt x="2622707" y="2743200"/>
+                </a:lnTo>
+                <a:lnTo>
+                  <a:pt x="2603134" y="2743200"/>
+                </a:lnTo>
+                <a:lnTo>
+                  <a:pt x="2583562" y="2743200"/>
+                </a:lnTo>
+                <a:lnTo>
+                  <a:pt x="2563989" y="2743200"/>
+                </a:lnTo>
+                <a:lnTo>
+                  <a:pt x="2544417" y="2743200"/>
+                </a:lnTo>
+                <a:lnTo>
+                  <a:pt x="2524844" y="2743200"/>
+                </a:lnTo>
+                <a:lnTo>
+                  <a:pt x="2505272" y="2743200"/>
+                </a:lnTo>
+                <a:lnTo>
+                  <a:pt x="2485700" y="2743200"/>
+                </a:lnTo>
+                <a:lnTo>
+                  <a:pt x="2466127" y="2743200"/>
+                </a:lnTo>
+                <a:lnTo>
+                  <a:pt x="2446555" y="2743200"/>
+                </a:lnTo>
+                <a:lnTo>
+                  <a:pt x="2426982" y="2743200"/>
+                </a:lnTo>
+                <a:lnTo>
+                  <a:pt x="2407410" y="2743200"/>
+                </a:lnTo>
+                <a:lnTo>
+                  <a:pt x="2387837" y="2743200"/>
+                </a:lnTo>
+                <a:lnTo>
+                  <a:pt x="2368265" y="2743200"/>
+                </a:lnTo>
+                <a:lnTo>
+                  <a:pt x="2348692" y="2743200"/>
+                </a:lnTo>
+                <a:lnTo>
+                  <a:pt x="2329120" y="2743200"/>
+                </a:lnTo>
+                <a:lnTo>
+                  <a:pt x="2309548" y="2743200"/>
+                </a:lnTo>
+                <a:lnTo>
+                  <a:pt x="2289975" y="2743200"/>
+                </a:lnTo>
+                <a:lnTo>
+                  <a:pt x="2270403" y="2743200"/>
+                </a:lnTo>
+                <a:lnTo>
+                  <a:pt x="2250830" y="2743200"/>
+                </a:lnTo>
+                <a:lnTo>
+                  <a:pt x="2231258" y="2743200"/>
+                </a:lnTo>
+                <a:lnTo>
+                  <a:pt x="2211685" y="2743200"/>
+                </a:lnTo>
+                <a:lnTo>
+                  <a:pt x="2192113" y="2743200"/>
+                </a:lnTo>
+                <a:lnTo>
+                  <a:pt x="2172541" y="2743200"/>
+                </a:lnTo>
+                <a:lnTo>
+                  <a:pt x="2152968" y="2743200"/>
+                </a:lnTo>
+                <a:lnTo>
+                  <a:pt x="2133396" y="2743200"/>
+                </a:lnTo>
+                <a:lnTo>
+                  <a:pt x="2113823" y="2743200"/>
+                </a:lnTo>
+                <a:lnTo>
+                  <a:pt x="2094251" y="2743200"/>
+                </a:lnTo>
+                <a:lnTo>
+                  <a:pt x="2074678" y="2743200"/>
+                </a:lnTo>
+                <a:lnTo>
+                  <a:pt x="2055106" y="2743200"/>
+                </a:lnTo>
+                <a:lnTo>
+                  <a:pt x="2035533" y="2743200"/>
+                </a:lnTo>
+                <a:lnTo>
+                  <a:pt x="2015961" y="2743200"/>
+                </a:lnTo>
+                <a:lnTo>
+                  <a:pt x="1996389" y="2743200"/>
+                </a:lnTo>
+                <a:lnTo>
+                  <a:pt x="1976816" y="2743200"/>
+                </a:lnTo>
+                <a:lnTo>
+                  <a:pt x="1957244" y="2743200"/>
+                </a:lnTo>
+                <a:lnTo>
+                  <a:pt x="1937671" y="2743200"/>
+                </a:lnTo>
+                <a:lnTo>
+                  <a:pt x="1918099" y="2743200"/>
+                </a:lnTo>
+                <a:lnTo>
+                  <a:pt x="1898526" y="2743200"/>
+                </a:lnTo>
+                <a:lnTo>
+                  <a:pt x="1878954" y="2743200"/>
+                </a:lnTo>
+                <a:lnTo>
+                  <a:pt x="1859381" y="2743200"/>
+                </a:lnTo>
+                <a:lnTo>
+                  <a:pt x="1839809" y="2743200"/>
+                </a:lnTo>
+                <a:lnTo>
+                  <a:pt x="1820237" y="2743200"/>
+                </a:lnTo>
+                <a:lnTo>
+                  <a:pt x="1800664" y="2743200"/>
+                </a:lnTo>
+                <a:lnTo>
+                  <a:pt x="1781092" y="2743200"/>
+                </a:lnTo>
+                <a:lnTo>
+                  <a:pt x="1761519" y="2743200"/>
+                </a:lnTo>
+                <a:lnTo>
+                  <a:pt x="1741947" y="2743200"/>
+                </a:lnTo>
+                <a:lnTo>
+                  <a:pt x="1722374" y="2743200"/>
+                </a:lnTo>
+                <a:lnTo>
+                  <a:pt x="1702802" y="2743200"/>
+                </a:lnTo>
+                <a:lnTo>
+                  <a:pt x="1683229" y="2743200"/>
+                </a:lnTo>
+                <a:lnTo>
+                  <a:pt x="1663657" y="2743200"/>
+                </a:lnTo>
+                <a:lnTo>
+                  <a:pt x="1644085" y="2743200"/>
+                </a:lnTo>
+                <a:lnTo>
+                  <a:pt x="1624512" y="2743200"/>
+                </a:lnTo>
+                <a:lnTo>
+                  <a:pt x="1604940" y="2743200"/>
+                </a:lnTo>
+                <a:lnTo>
+                  <a:pt x="1585367" y="2743200"/>
+                </a:lnTo>
+                <a:lnTo>
+                  <a:pt x="1565795" y="2743200"/>
+                </a:lnTo>
+                <a:lnTo>
+                  <a:pt x="1546222" y="2743200"/>
+                </a:lnTo>
+                <a:lnTo>
+                  <a:pt x="1526650" y="2743200"/>
+                </a:lnTo>
+                <a:lnTo>
+                  <a:pt x="1507077" y="2743200"/>
+                </a:lnTo>
+                <a:lnTo>
+                  <a:pt x="1487505" y="2743200"/>
+                </a:lnTo>
+                <a:lnTo>
+                  <a:pt x="1467933" y="2743200"/>
+                </a:lnTo>
+                <a:lnTo>
+                  <a:pt x="1448360" y="2743200"/>
+                </a:lnTo>
+                <a:lnTo>
+                  <a:pt x="1428788" y="2743200"/>
+                </a:lnTo>
+                <a:lnTo>
+                  <a:pt x="1409215" y="2743200"/>
+                </a:lnTo>
+                <a:lnTo>
+                  <a:pt x="1389643" y="2743200"/>
+                </a:lnTo>
+                <a:lnTo>
+                  <a:pt x="1370070" y="2743200"/>
+                </a:lnTo>
+                <a:lnTo>
+                  <a:pt x="1350498" y="2743200"/>
+                </a:lnTo>
+                <a:lnTo>
+                  <a:pt x="1330926" y="2743200"/>
+                </a:lnTo>
+                <a:lnTo>
+                  <a:pt x="1311353" y="2743200"/>
+                </a:lnTo>
+                <a:lnTo>
+                  <a:pt x="1291781" y="2743200"/>
+                </a:lnTo>
+                <a:lnTo>
+                  <a:pt x="1272208" y="2743200"/>
+                </a:lnTo>
+                <a:lnTo>
+                  <a:pt x="1252636" y="2743200"/>
+                </a:lnTo>
+                <a:lnTo>
+                  <a:pt x="1233063" y="2743200"/>
+                </a:lnTo>
+                <a:lnTo>
+                  <a:pt x="1213491" y="2743200"/>
+                </a:lnTo>
+                <a:lnTo>
+                  <a:pt x="1193918" y="2743200"/>
+                </a:lnTo>
+                <a:lnTo>
+                  <a:pt x="1174346" y="2743200"/>
+                </a:lnTo>
+                <a:lnTo>
+                  <a:pt x="1154774" y="2743200"/>
+                </a:lnTo>
+                <a:lnTo>
+                  <a:pt x="1135201" y="2743200"/>
+                </a:lnTo>
+                <a:lnTo>
+                  <a:pt x="1115629" y="2743200"/>
+                </a:lnTo>
+                <a:lnTo>
+                  <a:pt x="1096056" y="2743200"/>
+                </a:lnTo>
+                <a:lnTo>
+                  <a:pt x="1076484" y="2743200"/>
+                </a:lnTo>
+                <a:lnTo>
+                  <a:pt x="1056911" y="2743200"/>
+                </a:lnTo>
+                <a:lnTo>
+                  <a:pt x="1037339" y="2743200"/>
+                </a:lnTo>
+                <a:lnTo>
+                  <a:pt x="1017766" y="2743200"/>
+                </a:lnTo>
+                <a:lnTo>
+                  <a:pt x="998194" y="2743200"/>
+                </a:lnTo>
+                <a:lnTo>
+                  <a:pt x="978622" y="2743200"/>
+                </a:lnTo>
+                <a:lnTo>
+                  <a:pt x="959049" y="2743200"/>
+                </a:lnTo>
+                <a:lnTo>
+                  <a:pt x="939477" y="2743200"/>
+                </a:lnTo>
+                <a:lnTo>
+                  <a:pt x="919904" y="2743200"/>
+                </a:lnTo>
+                <a:lnTo>
+                  <a:pt x="900332" y="2743200"/>
+                </a:lnTo>
+                <a:lnTo>
+                  <a:pt x="880759" y="2743200"/>
+                </a:lnTo>
+                <a:lnTo>
+                  <a:pt x="861187" y="2743200"/>
+                </a:lnTo>
+                <a:lnTo>
+                  <a:pt x="841614" y="2743200"/>
+                </a:lnTo>
+                <a:lnTo>
+                  <a:pt x="822042" y="2743200"/>
+                </a:lnTo>
+                <a:lnTo>
+                  <a:pt x="802470" y="2743200"/>
+                </a:lnTo>
+                <a:lnTo>
+                  <a:pt x="782897" y="2743200"/>
+                </a:lnTo>
+                <a:lnTo>
+                  <a:pt x="763325" y="2743200"/>
+                </a:lnTo>
+                <a:lnTo>
+                  <a:pt x="743752" y="2743200"/>
+                </a:lnTo>
+                <a:lnTo>
+                  <a:pt x="724180" y="2743200"/>
+                </a:lnTo>
+                <a:lnTo>
+                  <a:pt x="704607" y="2743200"/>
+                </a:lnTo>
+                <a:lnTo>
+                  <a:pt x="685035" y="2743200"/>
+                </a:lnTo>
+                <a:lnTo>
+                  <a:pt x="665463" y="2743200"/>
+                </a:lnTo>
+                <a:lnTo>
+                  <a:pt x="645890" y="2743200"/>
+                </a:lnTo>
+                <a:lnTo>
+                  <a:pt x="626318" y="2743200"/>
+                </a:lnTo>
+                <a:lnTo>
+                  <a:pt x="606745" y="2743200"/>
+                </a:lnTo>
+                <a:lnTo>
+                  <a:pt x="587173" y="2743200"/>
+                </a:lnTo>
+                <a:lnTo>
+                  <a:pt x="567600" y="2743200"/>
+                </a:lnTo>
+                <a:lnTo>
+                  <a:pt x="548028" y="2743200"/>
+                </a:lnTo>
+                <a:lnTo>
+                  <a:pt x="528455" y="2743200"/>
+                </a:lnTo>
+                <a:lnTo>
+                  <a:pt x="508883" y="2743200"/>
+                </a:lnTo>
+                <a:lnTo>
+                  <a:pt x="489311" y="2743200"/>
+                </a:lnTo>
+                <a:lnTo>
+                  <a:pt x="469738" y="2743200"/>
+                </a:lnTo>
+                <a:lnTo>
+                  <a:pt x="450166" y="2743200"/>
+                </a:lnTo>
+                <a:lnTo>
+                  <a:pt x="430593" y="2743200"/>
+                </a:lnTo>
+                <a:lnTo>
+                  <a:pt x="411021" y="2743200"/>
+                </a:lnTo>
+                <a:lnTo>
+                  <a:pt x="391448" y="2743200"/>
+                </a:lnTo>
+                <a:lnTo>
+                  <a:pt x="371876" y="2743200"/>
+                </a:lnTo>
+                <a:lnTo>
+                  <a:pt x="352303" y="2743200"/>
+                </a:lnTo>
+                <a:lnTo>
+                  <a:pt x="332731" y="2743200"/>
+                </a:lnTo>
+                <a:lnTo>
+                  <a:pt x="313159" y="2743200"/>
+                </a:lnTo>
+                <a:lnTo>
+                  <a:pt x="293586" y="2743200"/>
+                </a:lnTo>
+                <a:lnTo>
+                  <a:pt x="274014" y="2743200"/>
+                </a:lnTo>
+                <a:lnTo>
+                  <a:pt x="254441" y="2743200"/>
+                </a:lnTo>
+                <a:lnTo>
+                  <a:pt x="234869" y="2743200"/>
+                </a:lnTo>
+                <a:lnTo>
+                  <a:pt x="215296" y="2743200"/>
+                </a:lnTo>
+                <a:lnTo>
+                  <a:pt x="195724" y="2743200"/>
+                </a:lnTo>
+                <a:lnTo>
+                  <a:pt x="176151" y="2743200"/>
+                </a:lnTo>
+                <a:lnTo>
+                  <a:pt x="156579" y="2743200"/>
+                </a:lnTo>
+                <a:lnTo>
+                  <a:pt x="137007" y="2743200"/>
+                </a:lnTo>
+                <a:lnTo>
+                  <a:pt x="117434" y="2743200"/>
+                </a:lnTo>
+                <a:lnTo>
+                  <a:pt x="97862" y="2743200"/>
+                </a:lnTo>
+                <a:lnTo>
+                  <a:pt x="78289" y="2743200"/>
+                </a:lnTo>
+                <a:lnTo>
+                  <a:pt x="58717" y="2743200"/>
+                </a:lnTo>
+                <a:lnTo>
+                  <a:pt x="39144" y="2743200"/>
+                </a:lnTo>
+                <a:lnTo>
+                  <a:pt x="19572" y="2743200"/>
+                </a:lnTo>
+                <a:lnTo>
+                  <a:pt x="0" y="2743200"/>
+                </a:lnTo>
+                <a:close/>
+              </a:path>
+            </a:pathLst>
+          </a:custGeom>
+          <a:solidFill>
+            <a:srgbClr val="8EDBD4">
+              <a:alpha val="25000"/>
+            </a:srgbClr>
+          </a:solidFill>
+          <a:ln w="10160">
+            <a:solidFill>
+              <a:srgbClr val="8EDBD4">
+                <a:alpha val="25000"/>
+              </a:srgbClr>
+            </a:solidFill>
+          </a:ln>
+          <a:effectLst/>
+        </p:spPr>
+        <p:txBody>
+          <a:bodyPr rtlCol="0" anchor="ctr"/>
+          <a:lstStyle/>
+          <a:p>
+            <a:pPr algn="ctr"/>
+          </a:p>
+        </p:txBody>
+      </p:sp>
+      <p:sp>
+        <p:nvSpPr>
+          <p:cNvPr id="30" name="C4-E02 polygon 28" descr="sci-ppt:o028"/>
+          <p:cNvSpPr/>
+          <p:nvPr/>
+        </p:nvSpPr>
+        <p:spPr>
+          <a:xfrm>
+            <a:off x="914400" y="1920240"/>
+            <a:ext cx="5852160" cy="2743200"/>
+          </a:xfrm>
+          <a:custGeom>
+            <a:avLst/>
+            <a:gdLst/>
+            <a:ahLst/>
+            <a:cxnLst/>
+            <a:rect l="l" t="t" r="r" b="b"/>
+            <a:pathLst>
+              <a:path w="5852160" h="2743200">
+                <a:moveTo>
+                  <a:pt x="0" y="2743200"/>
+                </a:moveTo>
+                <a:lnTo>
+                  <a:pt x="39144" y="2295045"/>
+                </a:lnTo>
+                <a:lnTo>
+                  <a:pt x="78289" y="1920106"/>
+                </a:lnTo>
+                <a:lnTo>
+                  <a:pt x="117434" y="1606419"/>
+                </a:lnTo>
+                <a:lnTo>
+                  <a:pt x="156579" y="1343980"/>
+                </a:lnTo>
+                <a:lnTo>
+                  <a:pt x="195724" y="1124415"/>
+                </a:lnTo>
+                <a:lnTo>
+                  <a:pt x="234869" y="940720"/>
+                </a:lnTo>
+                <a:lnTo>
+                  <a:pt x="274014" y="787035"/>
+                </a:lnTo>
+                <a:lnTo>
+                  <a:pt x="313159" y="658458"/>
+                </a:lnTo>
+                <a:lnTo>
+                  <a:pt x="352303" y="550886"/>
+                </a:lnTo>
+                <a:lnTo>
+                  <a:pt x="391448" y="460888"/>
+                </a:lnTo>
+                <a:lnTo>
+                  <a:pt x="430593" y="385593"/>
+                </a:lnTo>
+                <a:lnTo>
+                  <a:pt x="469738" y="322599"/>
+                </a:lnTo>
+                <a:lnTo>
+                  <a:pt x="508883" y="269896"/>
+                </a:lnTo>
+                <a:lnTo>
+                  <a:pt x="548028" y="225804"/>
+                </a:lnTo>
+                <a:lnTo>
+                  <a:pt x="587173" y="188914"/>
+                </a:lnTo>
+                <a:lnTo>
+                  <a:pt x="626318" y="158051"/>
+                </a:lnTo>
+                <a:lnTo>
+                  <a:pt x="665463" y="132231"/>
+                </a:lnTo>
+                <a:lnTo>
+                  <a:pt x="704607" y="110628"/>
+                </a:lnTo>
+                <a:lnTo>
+                  <a:pt x="743752" y="92555"/>
+                </a:lnTo>
+                <a:lnTo>
+                  <a:pt x="782897" y="77434"/>
+                </a:lnTo>
+                <a:lnTo>
+                  <a:pt x="822042" y="64784"/>
+                </a:lnTo>
+                <a:lnTo>
+                  <a:pt x="861187" y="54200"/>
+                </a:lnTo>
+                <a:lnTo>
+                  <a:pt x="900332" y="45345"/>
+                </a:lnTo>
+                <a:lnTo>
+                  <a:pt x="939477" y="37937"/>
+                </a:lnTo>
+                <a:lnTo>
+                  <a:pt x="978622" y="31739"/>
+                </a:lnTo>
+                <a:lnTo>
+                  <a:pt x="1017766" y="26554"/>
+                </a:lnTo>
+                <a:lnTo>
+                  <a:pt x="1056911" y="22216"/>
+                </a:lnTo>
+                <a:lnTo>
+                  <a:pt x="1096056" y="18586"/>
+                </a:lnTo>
+                <a:lnTo>
+                  <a:pt x="1135201" y="15550"/>
+                </a:lnTo>
+                <a:lnTo>
+                  <a:pt x="1174346" y="13009"/>
+                </a:lnTo>
+                <a:lnTo>
+                  <a:pt x="1213491" y="10884"/>
+                </a:lnTo>
+                <a:lnTo>
+                  <a:pt x="1252636" y="9106"/>
+                </a:lnTo>
+                <a:lnTo>
+                  <a:pt x="1291781" y="7618"/>
+                </a:lnTo>
+                <a:lnTo>
+                  <a:pt x="1330926" y="6373"/>
+                </a:lnTo>
+                <a:lnTo>
+                  <a:pt x="1370070" y="5332"/>
+                </a:lnTo>
+                <a:lnTo>
+                  <a:pt x="1409215" y="4461"/>
+                </a:lnTo>
+                <a:lnTo>
+                  <a:pt x="1448360" y="3732"/>
+                </a:lnTo>
+                <a:lnTo>
+                  <a:pt x="1487505" y="3122"/>
+                </a:lnTo>
+                <a:lnTo>
+                  <a:pt x="1526650" y="2612"/>
+                </a:lnTo>
+                <a:lnTo>
+                  <a:pt x="1565795" y="2185"/>
+                </a:lnTo>
+                <a:lnTo>
+                  <a:pt x="1604940" y="1828"/>
+                </a:lnTo>
+                <a:lnTo>
+                  <a:pt x="1644085" y="1529"/>
+                </a:lnTo>
+                <a:lnTo>
+                  <a:pt x="1683229" y="1280"/>
+                </a:lnTo>
+                <a:lnTo>
+                  <a:pt x="1722374" y="1070"/>
+                </a:lnTo>
+                <a:lnTo>
+                  <a:pt x="1761519" y="895"/>
+                </a:lnTo>
+                <a:lnTo>
+                  <a:pt x="1800664" y="749"/>
+                </a:lnTo>
+                <a:lnTo>
+                  <a:pt x="1839809" y="627"/>
+                </a:lnTo>
+                <a:lnTo>
+                  <a:pt x="1878954" y="524"/>
+                </a:lnTo>
+                <a:lnTo>
+                  <a:pt x="1918099" y="438"/>
+                </a:lnTo>
+                <a:lnTo>
+                  <a:pt x="1957244" y="367"/>
+                </a:lnTo>
+                <a:lnTo>
+                  <a:pt x="1996389" y="307"/>
+                </a:lnTo>
+                <a:lnTo>
+                  <a:pt x="2035533" y="257"/>
+                </a:lnTo>
+                <a:lnTo>
+                  <a:pt x="2074678" y="215"/>
+                </a:lnTo>
+                <a:lnTo>
+                  <a:pt x="2113823" y="179"/>
+                </a:lnTo>
+                <a:lnTo>
+                  <a:pt x="2152968" y="150"/>
+                </a:lnTo>
+                <a:lnTo>
+                  <a:pt x="2192113" y="125"/>
+                </a:lnTo>
+                <a:lnTo>
+                  <a:pt x="2231258" y="105"/>
+                </a:lnTo>
+                <a:lnTo>
+                  <a:pt x="2270403" y="88"/>
+                </a:lnTo>
+                <a:lnTo>
+                  <a:pt x="2309548" y="73"/>
+                </a:lnTo>
+                <a:lnTo>
+                  <a:pt x="2348692" y="61"/>
+                </a:lnTo>
+                <a:lnTo>
+                  <a:pt x="2387837" y="51"/>
+                </a:lnTo>
+                <a:lnTo>
+                  <a:pt x="2426982" y="43"/>
+                </a:lnTo>
+                <a:lnTo>
+                  <a:pt x="2466127" y="36"/>
+                </a:lnTo>
+                <a:lnTo>
+                  <a:pt x="2505272" y="30"/>
+                </a:lnTo>
+                <a:lnTo>
+                  <a:pt x="2544417" y="25"/>
+                </a:lnTo>
+                <a:lnTo>
+                  <a:pt x="2583562" y="21"/>
+                </a:lnTo>
+                <a:lnTo>
+                  <a:pt x="2622707" y="17"/>
+                </a:lnTo>
+                <a:lnTo>
+                  <a:pt x="2661852" y="14"/>
+                </a:lnTo>
+                <a:lnTo>
+                  <a:pt x="2700996" y="12"/>
+                </a:lnTo>
+                <a:lnTo>
+                  <a:pt x="2740141" y="10"/>
+                </a:lnTo>
+                <a:lnTo>
+                  <a:pt x="2779286" y="8"/>
+                </a:lnTo>
+                <a:lnTo>
+                  <a:pt x="2818431" y="7"/>
+                </a:lnTo>
+                <a:lnTo>
+                  <a:pt x="2857576" y="6"/>
+                </a:lnTo>
+                <a:lnTo>
+                  <a:pt x="2896721" y="5"/>
+                </a:lnTo>
+                <a:lnTo>
+                  <a:pt x="2935866" y="4"/>
+                </a:lnTo>
+                <a:lnTo>
+                  <a:pt x="2975011" y="3"/>
+                </a:lnTo>
+                <a:lnTo>
+                  <a:pt x="3014155" y="2"/>
+                </a:lnTo>
+                <a:lnTo>
+                  <a:pt x="3053300" y="2"/>
+                </a:lnTo>
+                <a:lnTo>
+                  <a:pt x="3092445" y="2"/>
+                </a:lnTo>
+                <a:lnTo>
+                  <a:pt x="3131590" y="1"/>
+                </a:lnTo>
+                <a:lnTo>
+                  <a:pt x="3170735" y="1"/>
+                </a:lnTo>
+                <a:lnTo>
+                  <a:pt x="3209880" y="1"/>
+                </a:lnTo>
+                <a:lnTo>
+                  <a:pt x="3249025" y="1"/>
+                </a:lnTo>
+                <a:lnTo>
+                  <a:pt x="3288170" y="0"/>
+                </a:lnTo>
+                <a:lnTo>
+                  <a:pt x="3327315" y="0"/>
+                </a:lnTo>
+                <a:lnTo>
+                  <a:pt x="3366459" y="0"/>
+                </a:lnTo>
+                <a:lnTo>
+                  <a:pt x="3405604" y="0"/>
+                </a:lnTo>
+                <a:lnTo>
+                  <a:pt x="3444749" y="0"/>
+                </a:lnTo>
+                <a:lnTo>
+                  <a:pt x="3483894" y="0"/>
+                </a:lnTo>
+                <a:lnTo>
+                  <a:pt x="3523039" y="0"/>
+                </a:lnTo>
+                <a:lnTo>
+                  <a:pt x="3562184" y="0"/>
+                </a:lnTo>
+                <a:lnTo>
+                  <a:pt x="3601329" y="0"/>
+                </a:lnTo>
+                <a:lnTo>
+                  <a:pt x="3640474" y="0"/>
+                </a:lnTo>
+                <a:lnTo>
+                  <a:pt x="3679618" y="0"/>
+                </a:lnTo>
+                <a:lnTo>
+                  <a:pt x="3718763" y="0"/>
+                </a:lnTo>
+                <a:lnTo>
+                  <a:pt x="3757908" y="0"/>
+                </a:lnTo>
+                <a:lnTo>
+                  <a:pt x="3797053" y="0"/>
+                </a:lnTo>
+                <a:lnTo>
+                  <a:pt x="3836198" y="0"/>
+                </a:lnTo>
+                <a:lnTo>
+                  <a:pt x="3875343" y="0"/>
+                </a:lnTo>
+                <a:lnTo>
+                  <a:pt x="3914488" y="0"/>
+                </a:lnTo>
+                <a:lnTo>
+                  <a:pt x="3953633" y="0"/>
+                </a:lnTo>
+                <a:lnTo>
+                  <a:pt x="3992778" y="0"/>
+                </a:lnTo>
+                <a:lnTo>
+                  <a:pt x="4031922" y="0"/>
+                </a:lnTo>
+                <a:lnTo>
+                  <a:pt x="4071067" y="0"/>
+                </a:lnTo>
+                <a:lnTo>
+                  <a:pt x="4110212" y="0"/>
+                </a:lnTo>
+                <a:lnTo>
+                  <a:pt x="4149357" y="0"/>
+                </a:lnTo>
+                <a:lnTo>
+                  <a:pt x="4188502" y="0"/>
+                </a:lnTo>
+                <a:lnTo>
+                  <a:pt x="4227647" y="0"/>
+                </a:lnTo>
+                <a:lnTo>
+                  <a:pt x="4266792" y="0"/>
+                </a:lnTo>
+                <a:lnTo>
+                  <a:pt x="4305937" y="0"/>
+                </a:lnTo>
+                <a:lnTo>
+                  <a:pt x="4345082" y="0"/>
+                </a:lnTo>
+                <a:lnTo>
+                  <a:pt x="4384226" y="0"/>
+                </a:lnTo>
+                <a:lnTo>
+                  <a:pt x="4423371" y="0"/>
+                </a:lnTo>
+                <a:lnTo>
+                  <a:pt x="4462516" y="0"/>
+                </a:lnTo>
+                <a:lnTo>
+                  <a:pt x="4501661" y="0"/>
+                </a:lnTo>
+                <a:lnTo>
+                  <a:pt x="4540806" y="0"/>
+                </a:lnTo>
+                <a:lnTo>
+                  <a:pt x="4579951" y="0"/>
+                </a:lnTo>
+                <a:lnTo>
+                  <a:pt x="4619096" y="0"/>
+                </a:lnTo>
+                <a:lnTo>
+                  <a:pt x="4658241" y="0"/>
+                </a:lnTo>
+                <a:lnTo>
+                  <a:pt x="4697385" y="0"/>
+                </a:lnTo>
+                <a:lnTo>
+                  <a:pt x="4736530" y="0"/>
+                </a:lnTo>
+                <a:lnTo>
+                  <a:pt x="4775675" y="0"/>
+                </a:lnTo>
+                <a:lnTo>
+                  <a:pt x="4814820" y="0"/>
+                </a:lnTo>
+                <a:lnTo>
+                  <a:pt x="4853965" y="0"/>
+                </a:lnTo>
+                <a:lnTo>
+                  <a:pt x="4893110" y="0"/>
+                </a:lnTo>
+                <a:lnTo>
+                  <a:pt x="4932255" y="0"/>
+                </a:lnTo>
+                <a:lnTo>
+                  <a:pt x="4971400" y="0"/>
+                </a:lnTo>
+                <a:lnTo>
+                  <a:pt x="5010545" y="2743200"/>
+                </a:lnTo>
+                <a:lnTo>
+                  <a:pt x="5049689" y="2743200"/>
+                </a:lnTo>
+                <a:lnTo>
+                  <a:pt x="5088834" y="2743200"/>
+                </a:lnTo>
+                <a:lnTo>
+                  <a:pt x="5127979" y="2743200"/>
+                </a:lnTo>
+                <a:lnTo>
+                  <a:pt x="5167124" y="2743200"/>
+                </a:lnTo>
+                <a:lnTo>
+                  <a:pt x="5206269" y="2743200"/>
+                </a:lnTo>
+                <a:lnTo>
+                  <a:pt x="5245414" y="2743200"/>
+                </a:lnTo>
+                <a:lnTo>
+                  <a:pt x="5284559" y="2743200"/>
+                </a:lnTo>
+                <a:lnTo>
+                  <a:pt x="5323704" y="2743200"/>
+                </a:lnTo>
+                <a:lnTo>
+                  <a:pt x="5362848" y="2743200"/>
+                </a:lnTo>
+                <a:lnTo>
+                  <a:pt x="5401993" y="2743200"/>
+                </a:lnTo>
+                <a:lnTo>
+                  <a:pt x="5441138" y="2743200"/>
+                </a:lnTo>
+                <a:lnTo>
+                  <a:pt x="5480283" y="2743200"/>
+                </a:lnTo>
+                <a:lnTo>
+                  <a:pt x="5519428" y="2743200"/>
+                </a:lnTo>
+                <a:lnTo>
+                  <a:pt x="5558573" y="2743200"/>
+                </a:lnTo>
+                <a:lnTo>
+                  <a:pt x="5597718" y="2743200"/>
+                </a:lnTo>
+                <a:lnTo>
+                  <a:pt x="5636863" y="2743200"/>
+                </a:lnTo>
+                <a:lnTo>
+                  <a:pt x="5676008" y="2743200"/>
+                </a:lnTo>
+                <a:lnTo>
+                  <a:pt x="5715152" y="2743200"/>
+                </a:lnTo>
+                <a:lnTo>
+                  <a:pt x="5754297" y="2743200"/>
+                </a:lnTo>
+                <a:lnTo>
+                  <a:pt x="5793442" y="2743200"/>
+                </a:lnTo>
+                <a:lnTo>
+                  <a:pt x="5832587" y="2743200"/>
+                </a:lnTo>
+                <a:lnTo>
+                  <a:pt x="5852160" y="2743200"/>
+                </a:lnTo>
+              </a:path>
+            </a:pathLst>
+          </a:custGeom>
+          <a:noFill/>
+          <a:ln w="38100">
+            <a:solidFill>
+              <a:srgbClr val="8EDBD4"/>
+            </a:solidFill>
+          </a:ln>
+          <a:effectLst/>
+        </p:spPr>
+        <p:txBody>
+          <a:bodyPr rtlCol="0" anchor="ctr"/>
+          <a:lstStyle/>
+          <a:p>
+            <a:pPr algn="ctr"/>
+          </a:p>
+        </p:txBody>
+      </p:sp>
+      <p:cxnSp>
+        <p:nvCxnSpPr>
+          <p:cNvPr id="31" name="C4-E02 line 29" descr="sci-ppt:o029"/>
+          <p:cNvCxnSpPr/>
+          <p:nvPr/>
+        </p:nvCxnSpPr>
+        <p:spPr>
+          <a:xfrm>
+            <a:off x="914400" y="1371600"/>
+            <a:ext cx="0" cy="3291840"/>
+          </a:xfrm>
+          <a:prstGeom prst="line">
+            <a:avLst/>
+          </a:prstGeom>
+          <a:ln w="16510">
+            <a:solidFill>
+              <a:srgbClr val="B4C7D2"/>
+            </a:solidFill>
+            <a:prstDash val="dash"/>
+          </a:ln>
+          <a:effectLst/>
+        </p:spPr>
+      </p:cxnSp>
+      <p:sp>
+        <p:nvSpPr>
+          <p:cNvPr id="32" name="C4-E02 text 30" descr="sci-ppt:o030"/>
           <p:cNvSpPr txBox="1"/>
           <p:nvPr/>
         </p:nvSpPr>
         <p:spPr>
           <a:xfrm>
-            <a:off x="320040" y="5596128"/>
-            <a:ext cx="11430000" cy="292608"/>
+            <a:off x="1938528" y="3200399"/>
+            <a:ext cx="2743200" cy="231648"/>
           </a:xfrm>
           <a:prstGeom prst="rect">
             <a:avLst/>
@@ -3720,7 +6247,7 @@
           <a:effectLst/>
         </p:spPr>
         <p:txBody>
-          <a:bodyPr wrap="square" lIns="27432" rIns="27432" tIns="18288" bIns="18288" anchor="ctr">
+          <a:bodyPr wrap="none" lIns="18288" rIns="18288" tIns="18288" bIns="18288" anchor="t">
             <a:spAutoFit/>
           </a:bodyPr>
           <a:lstStyle/>
@@ -3731,27 +6258,27 @@
               </a:spcAft>
             </a:pPr>
             <a:r>
-              <a:rPr sz="1150" b="0" i="0">
+              <a:rPr sz="1200" b="0" i="0">
                 <a:solidFill>
                   <a:srgbClr val="8EDBD4"/>
                 </a:solidFill>
                 <a:latin typeface="Arial"/>
               </a:rPr>
-              <a:t>A high pressure maximum does not specify work.</a:t>
-            </a:r>
-          </a:p>
-        </p:txBody>
-      </p:sp>
-      <p:sp>
-        <p:nvSpPr>
-          <p:cNvPr id="20" name="C4-E02 text 18" descr="sci-ppt:o018"/>
+              <a:t>area = impulse Iₗ = ∫F dt</a:t>
+            </a:r>
+          </a:p>
+        </p:txBody>
+      </p:sp>
+      <p:sp>
+        <p:nvSpPr>
+          <p:cNvPr id="33" name="C4-E02 text 31" descr="sci-ppt:o031"/>
           <p:cNvSpPr txBox="1"/>
           <p:nvPr/>
         </p:nvSpPr>
         <p:spPr>
           <a:xfrm>
-            <a:off x="320040" y="6473952"/>
-            <a:ext cx="11430000" cy="256032"/>
+            <a:off x="5376672" y="1499615"/>
+            <a:ext cx="457200" cy="223900"/>
           </a:xfrm>
           <a:prstGeom prst="rect">
             <a:avLst/>
@@ -3760,7 +6287,495 @@
           <a:effectLst/>
         </p:spPr>
         <p:txBody>
-          <a:bodyPr wrap="square" lIns="27432" rIns="27432" tIns="18288" bIns="18288" anchor="ctr">
+          <a:bodyPr wrap="none" lIns="18288" rIns="18288" tIns="18288" bIns="18288" anchor="t">
+            <a:spAutoFit/>
+          </a:bodyPr>
+          <a:lstStyle/>
+          <a:p>
+            <a:pPr algn="l">
+              <a:spcAft>
+                <a:spcPts val="0"/>
+              </a:spcAft>
+            </a:pPr>
+            <a:r>
+              <a:rPr sz="1150" b="0" i="0">
+                <a:solidFill>
+                  <a:srgbClr val="B4C7D2"/>
+                </a:solidFill>
+                <a:latin typeface="Arial"/>
+              </a:rPr>
+              <a:t>t_b</a:t>
+            </a:r>
+          </a:p>
+        </p:txBody>
+      </p:sp>
+      <p:sp>
+        <p:nvSpPr>
+          <p:cNvPr id="34" name="C4-E02 round_rect 32" descr="sci-ppt:o032"/>
+          <p:cNvSpPr/>
+          <p:nvPr/>
+        </p:nvSpPr>
+        <p:spPr>
+          <a:xfrm>
+            <a:off x="7040880" y="1371600"/>
+            <a:ext cx="4800600" cy="3291840"/>
+          </a:xfrm>
+          <a:prstGeom prst="roundRect">
+            <a:avLst/>
+          </a:prstGeom>
+          <a:solidFill>
+            <a:srgbClr val="213E4B"/>
+          </a:solidFill>
+          <a:ln w="20320">
+            <a:solidFill>
+              <a:srgbClr val="8EDBD4"/>
+            </a:solidFill>
+          </a:ln>
+          <a:effectLst/>
+        </p:spPr>
+        <p:txBody>
+          <a:bodyPr rtlCol="0" anchor="ctr"/>
+          <a:lstStyle/>
+          <a:p>
+            <a:pPr algn="ctr"/>
+          </a:p>
+        </p:txBody>
+      </p:sp>
+      <p:sp>
+        <p:nvSpPr>
+          <p:cNvPr id="35" name="C4-E02 text 33" descr="sci-ppt:o033"/>
+          <p:cNvSpPr txBox="1"/>
+          <p:nvPr/>
+        </p:nvSpPr>
+        <p:spPr>
+          <a:xfrm>
+            <a:off x="7150608" y="1426464"/>
+            <a:ext cx="4581144" cy="254889"/>
+          </a:xfrm>
+          <a:prstGeom prst="rect">
+            <a:avLst/>
+          </a:prstGeom>
+          <a:noFill/>
+          <a:effectLst/>
+        </p:spPr>
+        <p:txBody>
+          <a:bodyPr wrap="none" lIns="18288" rIns="18288" tIns="18288" bIns="18288" anchor="t">
+            <a:spAutoFit/>
+          </a:bodyPr>
+          <a:lstStyle/>
+          <a:p>
+            <a:pPr algn="l">
+              <a:spcAft>
+                <a:spcPts val="0"/>
+              </a:spcAft>
+            </a:pPr>
+            <a:r>
+              <a:rPr sz="1350" b="1" i="0">
+                <a:solidFill>
+                  <a:srgbClr val="8EDBD4"/>
+                </a:solidFill>
+                <a:latin typeface="Arial"/>
+              </a:rPr>
+              <a:t>Three different integrals</a:t>
+            </a:r>
+          </a:p>
+        </p:txBody>
+      </p:sp>
+      <p:sp>
+        <p:nvSpPr>
+          <p:cNvPr id="36" name="C4-E02 text 34" descr="sci-ppt:o034"/>
+          <p:cNvSpPr txBox="1"/>
+          <p:nvPr/>
+        </p:nvSpPr>
+        <p:spPr>
+          <a:xfrm>
+            <a:off x="7178040" y="1874519"/>
+            <a:ext cx="1097280" cy="239395"/>
+          </a:xfrm>
+          <a:prstGeom prst="rect">
+            <a:avLst/>
+          </a:prstGeom>
+          <a:noFill/>
+          <a:effectLst/>
+        </p:spPr>
+        <p:txBody>
+          <a:bodyPr wrap="none" lIns="18288" rIns="18288" tIns="18288" bIns="18288" anchor="t">
+            <a:spAutoFit/>
+          </a:bodyPr>
+          <a:lstStyle/>
+          <a:p>
+            <a:pPr algn="l">
+              <a:spcAft>
+                <a:spcPts val="0"/>
+              </a:spcAft>
+            </a:pPr>
+            <a:r>
+              <a:rPr sz="1250" b="1" i="0">
+                <a:solidFill>
+                  <a:srgbClr val="7FC8F8"/>
+                </a:solidFill>
+                <a:latin typeface="Arial"/>
+              </a:rPr>
+              <a:t>force</a:t>
+            </a:r>
+          </a:p>
+        </p:txBody>
+      </p:sp>
+      <p:sp>
+        <p:nvSpPr>
+          <p:cNvPr id="37" name="C4-E02 text 35" descr="sci-ppt:o035"/>
+          <p:cNvSpPr txBox="1"/>
+          <p:nvPr/>
+        </p:nvSpPr>
+        <p:spPr>
+          <a:xfrm>
+            <a:off x="8229600" y="1874519"/>
+            <a:ext cx="3474720" cy="239395"/>
+          </a:xfrm>
+          <a:prstGeom prst="rect">
+            <a:avLst/>
+          </a:prstGeom>
+          <a:noFill/>
+          <a:effectLst/>
+        </p:spPr>
+        <p:txBody>
+          <a:bodyPr wrap="none" lIns="18288" rIns="18288" tIns="18288" bIns="18288" anchor="t">
+            <a:spAutoFit/>
+          </a:bodyPr>
+          <a:lstStyle/>
+          <a:p>
+            <a:pPr algn="l">
+              <a:spcAft>
+                <a:spcPts val="0"/>
+              </a:spcAft>
+            </a:pPr>
+            <a:r>
+              <a:rPr sz="1250" b="1" i="0">
+                <a:solidFill>
+                  <a:srgbClr val="E7F0F3"/>
+                </a:solidFill>
+                <a:latin typeface="Arial"/>
+              </a:rPr>
+              <a:t>Fₗ = ∫ tₗ dA</a:t>
+            </a:r>
+          </a:p>
+        </p:txBody>
+      </p:sp>
+      <p:sp>
+        <p:nvSpPr>
+          <p:cNvPr id="38" name="C4-E02 text 36" descr="sci-ppt:o036"/>
+          <p:cNvSpPr txBox="1"/>
+          <p:nvPr/>
+        </p:nvSpPr>
+        <p:spPr>
+          <a:xfrm>
+            <a:off x="7178040" y="2587752"/>
+            <a:ext cx="1097280" cy="239395"/>
+          </a:xfrm>
+          <a:prstGeom prst="rect">
+            <a:avLst/>
+          </a:prstGeom>
+          <a:noFill/>
+          <a:effectLst/>
+        </p:spPr>
+        <p:txBody>
+          <a:bodyPr wrap="none" lIns="18288" rIns="18288" tIns="18288" bIns="18288" anchor="t">
+            <a:spAutoFit/>
+          </a:bodyPr>
+          <a:lstStyle/>
+          <a:p>
+            <a:pPr algn="l">
+              <a:spcAft>
+                <a:spcPts val="0"/>
+              </a:spcAft>
+            </a:pPr>
+            <a:r>
+              <a:rPr sz="1250" b="1" i="0">
+                <a:solidFill>
+                  <a:srgbClr val="F2B880"/>
+                </a:solidFill>
+                <a:latin typeface="Arial"/>
+              </a:rPr>
+              <a:t>impulse</a:t>
+            </a:r>
+          </a:p>
+        </p:txBody>
+      </p:sp>
+      <p:sp>
+        <p:nvSpPr>
+          <p:cNvPr id="39" name="C4-E02 text 37" descr="sci-ppt:o037"/>
+          <p:cNvSpPr txBox="1"/>
+          <p:nvPr/>
+        </p:nvSpPr>
+        <p:spPr>
+          <a:xfrm>
+            <a:off x="8229600" y="2587752"/>
+            <a:ext cx="3474720" cy="239395"/>
+          </a:xfrm>
+          <a:prstGeom prst="rect">
+            <a:avLst/>
+          </a:prstGeom>
+          <a:noFill/>
+          <a:effectLst/>
+        </p:spPr>
+        <p:txBody>
+          <a:bodyPr wrap="none" lIns="18288" rIns="18288" tIns="18288" bIns="18288" anchor="t">
+            <a:spAutoFit/>
+          </a:bodyPr>
+          <a:lstStyle/>
+          <a:p>
+            <a:pPr algn="l">
+              <a:spcAft>
+                <a:spcPts val="0"/>
+              </a:spcAft>
+            </a:pPr>
+            <a:r>
+              <a:rPr sz="1250" b="1" i="0">
+                <a:solidFill>
+                  <a:srgbClr val="E7F0F3"/>
+                </a:solidFill>
+                <a:latin typeface="Arial"/>
+              </a:rPr>
+              <a:t>Iₗ = ∫ Fₗ dt</a:t>
+            </a:r>
+          </a:p>
+        </p:txBody>
+      </p:sp>
+      <p:sp>
+        <p:nvSpPr>
+          <p:cNvPr id="40" name="C4-E02 text 38" descr="sci-ppt:o038"/>
+          <p:cNvSpPr txBox="1"/>
+          <p:nvPr/>
+        </p:nvSpPr>
+        <p:spPr>
+          <a:xfrm>
+            <a:off x="7178040" y="3300984"/>
+            <a:ext cx="1097280" cy="239395"/>
+          </a:xfrm>
+          <a:prstGeom prst="rect">
+            <a:avLst/>
+          </a:prstGeom>
+          <a:noFill/>
+          <a:effectLst/>
+        </p:spPr>
+        <p:txBody>
+          <a:bodyPr wrap="none" lIns="18288" rIns="18288" tIns="18288" bIns="18288" anchor="t">
+            <a:spAutoFit/>
+          </a:bodyPr>
+          <a:lstStyle/>
+          <a:p>
+            <a:pPr algn="l">
+              <a:spcAft>
+                <a:spcPts val="0"/>
+              </a:spcAft>
+            </a:pPr>
+            <a:r>
+              <a:rPr sz="1250" b="1" i="0">
+                <a:solidFill>
+                  <a:srgbClr val="F28BA0"/>
+                </a:solidFill>
+                <a:latin typeface="Arial"/>
+              </a:rPr>
+              <a:t>work</a:t>
+            </a:r>
+          </a:p>
+        </p:txBody>
+      </p:sp>
+      <p:sp>
+        <p:nvSpPr>
+          <p:cNvPr id="41" name="C4-E02 text 39" descr="sci-ppt:o039"/>
+          <p:cNvSpPr txBox="1"/>
+          <p:nvPr/>
+        </p:nvSpPr>
+        <p:spPr>
+          <a:xfrm>
+            <a:off x="8229600" y="3300984"/>
+            <a:ext cx="3474720" cy="239395"/>
+          </a:xfrm>
+          <a:prstGeom prst="rect">
+            <a:avLst/>
+          </a:prstGeom>
+          <a:noFill/>
+          <a:effectLst/>
+        </p:spPr>
+        <p:txBody>
+          <a:bodyPr wrap="none" lIns="18288" rIns="18288" tIns="18288" bIns="18288" anchor="t">
+            <a:spAutoFit/>
+          </a:bodyPr>
+          <a:lstStyle/>
+          <a:p>
+            <a:pPr algn="l">
+              <a:spcAft>
+                <a:spcPts val="0"/>
+              </a:spcAft>
+            </a:pPr>
+            <a:r>
+              <a:rPr sz="1250" b="1" i="0">
+                <a:solidFill>
+                  <a:srgbClr val="E7F0F3"/>
+                </a:solidFill>
+                <a:latin typeface="Arial"/>
+              </a:rPr>
+              <a:t>Wₗ = ∫∫ tₗ·v_f dA dt</a:t>
+            </a:r>
+          </a:p>
+        </p:txBody>
+      </p:sp>
+      <p:sp>
+        <p:nvSpPr>
+          <p:cNvPr id="42" name="C4-E02 text 40" descr="sci-ppt:o040"/>
+          <p:cNvSpPr txBox="1"/>
+          <p:nvPr/>
+        </p:nvSpPr>
+        <p:spPr>
+          <a:xfrm>
+            <a:off x="7178040" y="3977639"/>
+            <a:ext cx="4480560" cy="417576"/>
+          </a:xfrm>
+          <a:prstGeom prst="rect">
+            <a:avLst/>
+          </a:prstGeom>
+          <a:noFill/>
+          <a:effectLst/>
+        </p:spPr>
+        <p:txBody>
+          <a:bodyPr wrap="none" lIns="18288" rIns="18288" tIns="18288" bIns="18288" anchor="t">
+            <a:spAutoFit/>
+          </a:bodyPr>
+          <a:lstStyle/>
+          <a:p>
+            <a:pPr algn="l">
+              <a:spcAft>
+                <a:spcPts val="0"/>
+              </a:spcAft>
+            </a:pPr>
+            <a:r>
+              <a:rPr sz="1200" b="0" i="0">
+                <a:solidFill>
+                  <a:srgbClr val="B4C7D2"/>
+                </a:solidFill>
+                <a:latin typeface="Arial"/>
+              </a:rPr>
+              <a:t>Work needs the surface velocity v_f; force and impulse</a:t>
+            </a:r>
+          </a:p>
+          <a:p>
+            <a:pPr algn="l">
+              <a:spcAft>
+                <a:spcPts val="0"/>
+              </a:spcAft>
+            </a:pPr>
+            <a:r>
+              <a:rPr sz="1200" b="0" i="0">
+                <a:solidFill>
+                  <a:srgbClr val="B4C7D2"/>
+                </a:solidFill>
+                <a:latin typeface="Arial"/>
+              </a:rPr>
+              <a:t>do not.</a:t>
+            </a:r>
+          </a:p>
+        </p:txBody>
+      </p:sp>
+      <p:sp>
+        <p:nvSpPr>
+          <p:cNvPr id="43" name="C4-E02 text 41" descr="sci-ppt:o041"/>
+          <p:cNvSpPr txBox="1"/>
+          <p:nvPr/>
+        </p:nvSpPr>
+        <p:spPr>
+          <a:xfrm>
+            <a:off x="914400" y="5486400"/>
+            <a:ext cx="10972800" cy="239395"/>
+          </a:xfrm>
+          <a:prstGeom prst="rect">
+            <a:avLst/>
+          </a:prstGeom>
+          <a:noFill/>
+          <a:effectLst/>
+        </p:spPr>
+        <p:txBody>
+          <a:bodyPr wrap="none" lIns="18288" rIns="18288" tIns="18288" bIns="18288" anchor="t">
+            <a:spAutoFit/>
+          </a:bodyPr>
+          <a:lstStyle/>
+          <a:p>
+            <a:pPr algn="l">
+              <a:spcAft>
+                <a:spcPts val="0"/>
+              </a:spcAft>
+            </a:pPr>
+            <a:r>
+              <a:rPr sz="1250" b="0" i="0">
+                <a:solidFill>
+                  <a:srgbClr val="E7F0F3"/>
+                </a:solidFill>
+                <a:latin typeface="Arial"/>
+              </a:rPr>
+              <a:t>The same footprint A_f(t) supplies force and impulse. A load on a wall that does not move delivers impulse but no work.</a:t>
+            </a:r>
+          </a:p>
+        </p:txBody>
+      </p:sp>
+      <p:sp>
+        <p:nvSpPr>
+          <p:cNvPr id="44" name="C4-E02 text 42" descr="sci-ppt:o042"/>
+          <p:cNvSpPr txBox="1"/>
+          <p:nvPr/>
+        </p:nvSpPr>
+        <p:spPr>
+          <a:xfrm>
+            <a:off x="914400" y="5943600"/>
+            <a:ext cx="10972800" cy="231648"/>
+          </a:xfrm>
+          <a:prstGeom prst="rect">
+            <a:avLst/>
+          </a:prstGeom>
+          <a:noFill/>
+          <a:effectLst/>
+        </p:spPr>
+        <p:txBody>
+          <a:bodyPr wrap="none" lIns="18288" rIns="18288" tIns="18288" bIns="18288" anchor="t">
+            <a:spAutoFit/>
+          </a:bodyPr>
+          <a:lstStyle/>
+          <a:p>
+            <a:pPr algn="l">
+              <a:spcAft>
+                <a:spcPts val="0"/>
+              </a:spcAft>
+            </a:pPr>
+            <a:r>
+              <a:rPr sz="1200" b="0" i="0">
+                <a:solidFill>
+                  <a:srgbClr val="B4C7D2"/>
+                </a:solidFill>
+                <a:latin typeface="Arial"/>
+              </a:rPr>
+              <a:t>Event window: tₐ to t_b.</a:t>
+            </a:r>
+          </a:p>
+        </p:txBody>
+      </p:sp>
+      <p:sp>
+        <p:nvSpPr>
+          <p:cNvPr id="45" name="C4-E02 text 43" descr="sci-ppt:o043"/>
+          <p:cNvSpPr txBox="1"/>
+          <p:nvPr/>
+        </p:nvSpPr>
+        <p:spPr>
+          <a:xfrm>
+            <a:off x="320040" y="6510528"/>
+            <a:ext cx="11521440" cy="200660"/>
+          </a:xfrm>
+          <a:prstGeom prst="rect">
+            <a:avLst/>
+          </a:prstGeom>
+          <a:noFill/>
+          <a:effectLst/>
+        </p:spPr>
+        <p:txBody>
+          <a:bodyPr wrap="none" lIns="18288" rIns="18288" tIns="18288" bIns="18288" anchor="t">
             <a:spAutoFit/>
           </a:bodyPr>
           <a:lstStyle/>
@@ -3777,7 +6792,7 @@
                 </a:solidFill>
                 <a:latin typeface="Arial"/>
               </a:rPr>
-              <a:t>Model schematic; geometry is not to scale.</a:t>
+              <a:t>Exact definitions of Eq. C4-E02; curve is a schematic force history.</a:t>
             </a:r>
           </a:p>
         </p:txBody>
